--- a/templates/vocabulary_template_v2.pptx
+++ b/templates/vocabulary_template_v2.pptx
@@ -3196,65 +3196,6 @@
           </a:p>
         </p:txBody>
       </p:sp>
-      <p:sp>
-        <p:nvSpPr>
-          <p:cNvPr id="4" name="TextBox 3"/>
-          <p:cNvSpPr txBox="1"/>
-          <p:nvPr/>
-        </p:nvSpPr>
-        <p:spPr>
-          <a:xfrm>
-            <a:off x="7277098" y="1425516"/>
-            <a:ext cx="2838451" cy="253916"/>
-          </a:xfrm>
-          <a:prstGeom prst="rect">
-            <a:avLst/>
-          </a:prstGeom>
-          <a:noFill/>
-        </p:spPr>
-        <p:txBody>
-          <a:bodyPr wrap="square" lIns="0" tIns="0" rIns="0" bIns="0" anchor="ctr">
-            <a:spAutoFit/>
-          </a:bodyPr>
-          <a:lstStyle/>
-          <a:p>
-            <a:pPr algn="ctr"/>
-            <a:r>
-              <a:rPr lang="en-GB" sz="1650" u="none" dirty="0">
-                <a:solidFill>
-                  <a:srgbClr val="472D33"/>
-                </a:solidFill>
-                <a:latin typeface="Poppins ExtraBold"/>
-              </a:rPr>
-              <a:t>{{</a:t>
-            </a:r>
-            <a:r>
-              <a:rPr lang="en-GB" sz="1400" dirty="0">
-                <a:solidFill>
-                  <a:srgbClr val="472D33"/>
-                </a:solidFill>
-                <a:latin typeface="Poppins ExtraBold"/>
-              </a:rPr>
-              <a:t>PRONUNCIATION</a:t>
-            </a:r>
-            <a:r>
-              <a:rPr lang="en-GB" sz="1650" u="none" dirty="0">
-                <a:solidFill>
-                  <a:srgbClr val="472D33"/>
-                </a:solidFill>
-                <a:latin typeface="Poppins ExtraBold"/>
-              </a:rPr>
-              <a:t>}}</a:t>
-            </a:r>
-            <a:endParaRPr sz="1650" u="none" dirty="0">
-              <a:solidFill>
-                <a:srgbClr val="472D33"/>
-              </a:solidFill>
-              <a:latin typeface="Poppins ExtraBold"/>
-            </a:endParaRPr>
-          </a:p>
-        </p:txBody>
-      </p:sp>
       <p:pic>
         <p:nvPicPr>
           <p:cNvPr id="5" name="Picture 4" descr="image.png"/>
@@ -3705,6 +3646,133 @@
                 <a:srgbClr val="475569"/>
               </a:solidFill>
               <a:latin typeface="Noto Sans SemiBold"/>
+            </a:endParaRPr>
+          </a:p>
+        </p:txBody>
+      </p:sp>
+      <p:sp>
+        <p:nvSpPr>
+          <p:cNvPr id="10" name="TextBox 9">
+            <a:extLst>
+              <a:ext uri="{FF2B5EF4-FFF2-40B4-BE49-F238E27FC236}">
+                <a16:creationId xmlns:a16="http://schemas.microsoft.com/office/drawing/2014/main" id="{0A537A4F-4D0A-BFF3-9AE8-11D8B8210CD5}"/>
+              </a:ext>
+            </a:extLst>
+          </p:cNvPr>
+          <p:cNvSpPr txBox="1"/>
+          <p:nvPr/>
+        </p:nvSpPr>
+        <p:spPr>
+          <a:xfrm>
+            <a:off x="4123470" y="1605828"/>
+            <a:ext cx="2190750" cy="923330"/>
+          </a:xfrm>
+          <a:prstGeom prst="rect">
+            <a:avLst/>
+          </a:prstGeom>
+          <a:noFill/>
+        </p:spPr>
+        <p:txBody>
+          <a:bodyPr wrap="square" rtlCol="0">
+            <a:spAutoFit/>
+          </a:bodyPr>
+          <a:lstStyle/>
+          <a:p>
+            <a:pPr algn="ctr"/>
+            <a:r>
+              <a:rPr lang="en-GB" b="1" dirty="0"/>
+              <a:t>{{HINDI}}, {{MALAYALAM}},</a:t>
+            </a:r>
+            <a:br>
+              <a:rPr lang="en-GB" b="1" dirty="0"/>
+            </a:br>
+            <a:r>
+              <a:rPr lang="en-GB" b="1" dirty="0"/>
+              <a:t>{{TAMIL}}</a:t>
+            </a:r>
+            <a:endParaRPr lang="en-IN" b="1" dirty="0"/>
+          </a:p>
+        </p:txBody>
+      </p:sp>
+      <p:sp>
+        <p:nvSpPr>
+          <p:cNvPr id="15" name="TextBox 14">
+            <a:extLst>
+              <a:ext uri="{FF2B5EF4-FFF2-40B4-BE49-F238E27FC236}">
+                <a16:creationId xmlns:a16="http://schemas.microsoft.com/office/drawing/2014/main" id="{9546E987-1B6A-FE97-9592-C215495A06B3}"/>
+              </a:ext>
+            </a:extLst>
+          </p:cNvPr>
+          <p:cNvSpPr txBox="1"/>
+          <p:nvPr/>
+        </p:nvSpPr>
+        <p:spPr>
+          <a:xfrm>
+            <a:off x="314325" y="6055475"/>
+            <a:ext cx="2381250" cy="369332"/>
+          </a:xfrm>
+          <a:prstGeom prst="rect">
+            <a:avLst/>
+          </a:prstGeom>
+          <a:noFill/>
+        </p:spPr>
+        <p:txBody>
+          <a:bodyPr wrap="square" rtlCol="0">
+            <a:spAutoFit/>
+          </a:bodyPr>
+          <a:lstStyle/>
+          <a:p>
+            <a:r>
+              <a:rPr lang="en-GB" dirty="0"/>
+              <a:t>{{WORD_NUMBER}}</a:t>
+            </a:r>
+            <a:endParaRPr lang="en-IN" dirty="0"/>
+          </a:p>
+        </p:txBody>
+      </p:sp>
+      <p:sp>
+        <p:nvSpPr>
+          <p:cNvPr id="17" name="TextBox 16">
+            <a:extLst>
+              <a:ext uri="{FF2B5EF4-FFF2-40B4-BE49-F238E27FC236}">
+                <a16:creationId xmlns:a16="http://schemas.microsoft.com/office/drawing/2014/main" id="{D9ED7E96-20C9-C5ED-2E4C-C2B78876EA54}"/>
+              </a:ext>
+            </a:extLst>
+          </p:cNvPr>
+          <p:cNvSpPr txBox="1"/>
+          <p:nvPr/>
+        </p:nvSpPr>
+        <p:spPr>
+          <a:xfrm>
+            <a:off x="7277098" y="1425516"/>
+            <a:ext cx="2838451" cy="253916"/>
+          </a:xfrm>
+          <a:prstGeom prst="rect">
+            <a:avLst/>
+          </a:prstGeom>
+          <a:noFill/>
+        </p:spPr>
+        <p:txBody>
+          <a:bodyPr wrap="square" lIns="0" tIns="0" rIns="0" bIns="0" anchor="ctr">
+            <a:spAutoFit/>
+          </a:bodyPr>
+          <a:lstStyle/>
+          <a:p>
+            <a:pPr algn="ctr"/>
+            <a:r>
+              <a:rPr lang="en-GB" sz="1650" dirty="0">
+                <a:solidFill>
+                  <a:srgbClr val="472D33"/>
+                </a:solidFill>
+                <a:latin typeface="Poppins ExtraBold"/>
+              </a:rPr>
+              <a:t>{{ABC}}</a:t>
+            </a:r>
+            <a:endParaRPr sz="1650" u="none" dirty="0">
+              <a:solidFill>
+                <a:srgbClr val="472D33"/>
+              </a:solidFill>
+              <a:latin typeface="Poppins ExtraBold"/>
             </a:endParaRPr>
           </a:p>
         </p:txBody>
@@ -3885,31 +3953,13 @@
           <a:p>
             <a:pPr algn="ctr"/>
             <a:r>
-              <a:rPr lang="en-GB" sz="1650" u="none" dirty="0">
+              <a:rPr lang="en-GB" sz="1650" dirty="0">
                 <a:solidFill>
                   <a:srgbClr val="472D33"/>
                 </a:solidFill>
                 <a:latin typeface="Poppins ExtraBold"/>
               </a:rPr>
-              <a:t>{{</a:t>
-            </a:r>
-            <a:r>
-              <a:rPr lang="en-GB" sz="1400" dirty="0">
-                <a:solidFill>
-                  <a:srgbClr val="472D33"/>
-                </a:solidFill>
-                <a:latin typeface="Poppins ExtraBold"/>
-              </a:rPr>
-              <a:t>PRONUNCIATION</a:t>
-            </a:r>
-            <a:r>
-              <a:rPr lang="en-GB" sz="1650" u="none" dirty="0">
-                <a:solidFill>
-                  <a:srgbClr val="472D33"/>
-                </a:solidFill>
-                <a:latin typeface="Poppins ExtraBold"/>
-              </a:rPr>
-              <a:t>}}</a:t>
+              <a:t>{{ABC}}</a:t>
             </a:r>
             <a:endParaRPr sz="1650" u="none" dirty="0">
               <a:solidFill>
@@ -4447,6 +4497,86 @@
               </a:solidFill>
               <a:latin typeface="Poppins ExtraBold"/>
             </a:endParaRPr>
+          </a:p>
+        </p:txBody>
+      </p:sp>
+      <p:sp>
+        <p:nvSpPr>
+          <p:cNvPr id="13" name="TextBox 12">
+            <a:extLst>
+              <a:ext uri="{FF2B5EF4-FFF2-40B4-BE49-F238E27FC236}">
+                <a16:creationId xmlns:a16="http://schemas.microsoft.com/office/drawing/2014/main" id="{905DD7DE-7D39-D652-3399-C6F0644DC3D3}"/>
+              </a:ext>
+            </a:extLst>
+          </p:cNvPr>
+          <p:cNvSpPr txBox="1"/>
+          <p:nvPr/>
+        </p:nvSpPr>
+        <p:spPr>
+          <a:xfrm>
+            <a:off x="4819651" y="4057650"/>
+            <a:ext cx="2190750" cy="923330"/>
+          </a:xfrm>
+          <a:prstGeom prst="rect">
+            <a:avLst/>
+          </a:prstGeom>
+          <a:noFill/>
+        </p:spPr>
+        <p:txBody>
+          <a:bodyPr wrap="square" rtlCol="0">
+            <a:spAutoFit/>
+          </a:bodyPr>
+          <a:lstStyle/>
+          <a:p>
+            <a:pPr algn="ctr"/>
+            <a:r>
+              <a:rPr lang="en-GB" b="1" dirty="0"/>
+              <a:t>{{HINDI}}, {{MALAYALAM}},</a:t>
+            </a:r>
+            <a:br>
+              <a:rPr lang="en-GB" b="1" dirty="0"/>
+            </a:br>
+            <a:r>
+              <a:rPr lang="en-GB" b="1" dirty="0"/>
+              <a:t>{{TAMIL}}</a:t>
+            </a:r>
+            <a:endParaRPr lang="en-IN" b="1" dirty="0"/>
+          </a:p>
+        </p:txBody>
+      </p:sp>
+      <p:sp>
+        <p:nvSpPr>
+          <p:cNvPr id="14" name="TextBox 13">
+            <a:extLst>
+              <a:ext uri="{FF2B5EF4-FFF2-40B4-BE49-F238E27FC236}">
+                <a16:creationId xmlns:a16="http://schemas.microsoft.com/office/drawing/2014/main" id="{297F8D2F-B09A-B1B4-583C-48301F7AAEF1}"/>
+              </a:ext>
+            </a:extLst>
+          </p:cNvPr>
+          <p:cNvSpPr txBox="1"/>
+          <p:nvPr/>
+        </p:nvSpPr>
+        <p:spPr>
+          <a:xfrm>
+            <a:off x="314325" y="6055475"/>
+            <a:ext cx="2381250" cy="369332"/>
+          </a:xfrm>
+          <a:prstGeom prst="rect">
+            <a:avLst/>
+          </a:prstGeom>
+          <a:noFill/>
+        </p:spPr>
+        <p:txBody>
+          <a:bodyPr wrap="square" rtlCol="0">
+            <a:spAutoFit/>
+          </a:bodyPr>
+          <a:lstStyle/>
+          <a:p>
+            <a:r>
+              <a:rPr lang="en-GB" dirty="0"/>
+              <a:t>{{WORD_NUMBER}}</a:t>
+            </a:r>
+            <a:endParaRPr lang="en-IN" dirty="0"/>
           </a:p>
         </p:txBody>
       </p:sp>
@@ -4631,31 +4761,13 @@
           <a:p>
             <a:pPr algn="ctr"/>
             <a:r>
-              <a:rPr lang="en-GB" sz="1650" u="none" dirty="0">
+              <a:rPr lang="en-GB" sz="1650" dirty="0">
                 <a:solidFill>
                   <a:srgbClr val="472D33"/>
                 </a:solidFill>
                 <a:latin typeface="Poppins ExtraBold"/>
               </a:rPr>
-              <a:t>{{</a:t>
-            </a:r>
-            <a:r>
-              <a:rPr lang="en-GB" sz="1400" dirty="0">
-                <a:solidFill>
-                  <a:srgbClr val="472D33"/>
-                </a:solidFill>
-                <a:latin typeface="Poppins ExtraBold"/>
-              </a:rPr>
-              <a:t>PRONUNCIATION</a:t>
-            </a:r>
-            <a:r>
-              <a:rPr lang="en-GB" sz="1650" u="none" dirty="0">
-                <a:solidFill>
-                  <a:srgbClr val="472D33"/>
-                </a:solidFill>
-                <a:latin typeface="Poppins ExtraBold"/>
-              </a:rPr>
-              <a:t>}}</a:t>
+              <a:t>{{ABC}}</a:t>
             </a:r>
             <a:endParaRPr sz="1650" u="none" dirty="0">
               <a:solidFill>
@@ -5257,6 +5369,122 @@
               </a:solidFill>
               <a:latin typeface="Poppins ExtraBold"/>
             </a:endParaRPr>
+          </a:p>
+        </p:txBody>
+      </p:sp>
+      <p:sp>
+        <p:nvSpPr>
+          <p:cNvPr id="13" name="TextBox 12">
+            <a:extLst>
+              <a:ext uri="{FF2B5EF4-FFF2-40B4-BE49-F238E27FC236}">
+                <a16:creationId xmlns:a16="http://schemas.microsoft.com/office/drawing/2014/main" id="{B1CB6EE9-A13A-C353-7C57-19E97573E6EC}"/>
+              </a:ext>
+            </a:extLst>
+          </p:cNvPr>
+          <p:cNvSpPr txBox="1"/>
+          <p:nvPr/>
+        </p:nvSpPr>
+        <p:spPr>
+          <a:xfrm>
+            <a:off x="4819651" y="4057650"/>
+            <a:ext cx="2190750" cy="923330"/>
+          </a:xfrm>
+          <a:prstGeom prst="rect">
+            <a:avLst/>
+          </a:prstGeom>
+          <a:noFill/>
+        </p:spPr>
+        <p:txBody>
+          <a:bodyPr wrap="square" rtlCol="0">
+            <a:spAutoFit/>
+          </a:bodyPr>
+          <a:lstStyle/>
+          <a:p>
+            <a:pPr algn="ctr"/>
+            <a:r>
+              <a:rPr lang="en-GB" b="1" dirty="0"/>
+              <a:t>{{HINDI}}, {{MALAYALAM}},</a:t>
+            </a:r>
+            <a:br>
+              <a:rPr lang="en-GB" b="1" dirty="0"/>
+            </a:br>
+            <a:r>
+              <a:rPr lang="en-GB" b="1" dirty="0"/>
+              <a:t>{{TAMIL}}</a:t>
+            </a:r>
+            <a:endParaRPr lang="en-IN" b="1" dirty="0"/>
+          </a:p>
+        </p:txBody>
+      </p:sp>
+      <p:sp>
+        <p:nvSpPr>
+          <p:cNvPr id="14" name="TextBox 13">
+            <a:extLst>
+              <a:ext uri="{FF2B5EF4-FFF2-40B4-BE49-F238E27FC236}">
+                <a16:creationId xmlns:a16="http://schemas.microsoft.com/office/drawing/2014/main" id="{DA549B56-9DFE-47C2-5021-87EA5CA59DD7}"/>
+              </a:ext>
+            </a:extLst>
+          </p:cNvPr>
+          <p:cNvSpPr txBox="1"/>
+          <p:nvPr/>
+        </p:nvSpPr>
+        <p:spPr>
+          <a:xfrm>
+            <a:off x="314325" y="6055475"/>
+            <a:ext cx="2381250" cy="369332"/>
+          </a:xfrm>
+          <a:prstGeom prst="rect">
+            <a:avLst/>
+          </a:prstGeom>
+          <a:noFill/>
+        </p:spPr>
+        <p:txBody>
+          <a:bodyPr wrap="square" rtlCol="0">
+            <a:spAutoFit/>
+          </a:bodyPr>
+          <a:lstStyle/>
+          <a:p>
+            <a:r>
+              <a:rPr lang="en-GB" dirty="0"/>
+              <a:t>{{WORD_NUMBER}}</a:t>
+            </a:r>
+            <a:endParaRPr lang="en-IN" dirty="0"/>
+          </a:p>
+        </p:txBody>
+      </p:sp>
+      <p:sp>
+        <p:nvSpPr>
+          <p:cNvPr id="17" name="TextBox 16">
+            <a:extLst>
+              <a:ext uri="{FF2B5EF4-FFF2-40B4-BE49-F238E27FC236}">
+                <a16:creationId xmlns:a16="http://schemas.microsoft.com/office/drawing/2014/main" id="{740F27BC-5AF1-DB1A-0866-514662520B18}"/>
+              </a:ext>
+            </a:extLst>
+          </p:cNvPr>
+          <p:cNvSpPr txBox="1"/>
+          <p:nvPr/>
+        </p:nvSpPr>
+        <p:spPr>
+          <a:xfrm>
+            <a:off x="3343716" y="5465198"/>
+            <a:ext cx="2753032" cy="369332"/>
+          </a:xfrm>
+          <a:prstGeom prst="rect">
+            <a:avLst/>
+          </a:prstGeom>
+          <a:noFill/>
+        </p:spPr>
+        <p:txBody>
+          <a:bodyPr wrap="square" rtlCol="0">
+            <a:spAutoFit/>
+          </a:bodyPr>
+          <a:lstStyle/>
+          <a:p>
+            <a:r>
+              <a:rPr lang="en-GB" dirty="0"/>
+              <a:t>{{PRESENT_SENTENCE}}</a:t>
+            </a:r>
+            <a:endParaRPr lang="en-IN" dirty="0"/>
           </a:p>
         </p:txBody>
       </p:sp>
@@ -5441,31 +5669,13 @@
           <a:p>
             <a:pPr algn="ctr"/>
             <a:r>
-              <a:rPr lang="en-GB" sz="1650" u="none" dirty="0">
+              <a:rPr lang="en-GB" sz="1650" dirty="0">
                 <a:solidFill>
                   <a:srgbClr val="472D33"/>
                 </a:solidFill>
                 <a:latin typeface="Poppins ExtraBold"/>
               </a:rPr>
-              <a:t>{{</a:t>
-            </a:r>
-            <a:r>
-              <a:rPr lang="en-GB" sz="1400" dirty="0">
-                <a:solidFill>
-                  <a:srgbClr val="472D33"/>
-                </a:solidFill>
-                <a:latin typeface="Poppins ExtraBold"/>
-              </a:rPr>
-              <a:t>PRONUNCIATION</a:t>
-            </a:r>
-            <a:r>
-              <a:rPr lang="en-GB" sz="1650" u="none" dirty="0">
-                <a:solidFill>
-                  <a:srgbClr val="472D33"/>
-                </a:solidFill>
-                <a:latin typeface="Poppins ExtraBold"/>
-              </a:rPr>
-              <a:t>}}</a:t>
+              <a:t>{{ABC}}</a:t>
             </a:r>
             <a:endParaRPr sz="1650" u="none" dirty="0">
               <a:solidFill>
@@ -6149,6 +6359,158 @@
               </a:solidFill>
               <a:latin typeface="Poppins ExtraBold"/>
             </a:endParaRPr>
+          </a:p>
+        </p:txBody>
+      </p:sp>
+      <p:sp>
+        <p:nvSpPr>
+          <p:cNvPr id="14" name="TextBox 13">
+            <a:extLst>
+              <a:ext uri="{FF2B5EF4-FFF2-40B4-BE49-F238E27FC236}">
+                <a16:creationId xmlns:a16="http://schemas.microsoft.com/office/drawing/2014/main" id="{E39B2766-06EB-ACF1-5F47-992137BDF7AC}"/>
+              </a:ext>
+            </a:extLst>
+          </p:cNvPr>
+          <p:cNvSpPr txBox="1"/>
+          <p:nvPr/>
+        </p:nvSpPr>
+        <p:spPr>
+          <a:xfrm>
+            <a:off x="3794329" y="2583039"/>
+            <a:ext cx="2190750" cy="923330"/>
+          </a:xfrm>
+          <a:prstGeom prst="rect">
+            <a:avLst/>
+          </a:prstGeom>
+          <a:noFill/>
+        </p:spPr>
+        <p:txBody>
+          <a:bodyPr wrap="square" rtlCol="0">
+            <a:spAutoFit/>
+          </a:bodyPr>
+          <a:lstStyle/>
+          <a:p>
+            <a:pPr algn="ctr"/>
+            <a:r>
+              <a:rPr lang="en-GB" b="1" dirty="0"/>
+              <a:t>{{HINDI}}, {{MALAYALAM}},</a:t>
+            </a:r>
+            <a:br>
+              <a:rPr lang="en-GB" b="1" dirty="0"/>
+            </a:br>
+            <a:r>
+              <a:rPr lang="en-GB" b="1" dirty="0"/>
+              <a:t>{{TAMIL}}</a:t>
+            </a:r>
+            <a:endParaRPr lang="en-IN" b="1" dirty="0"/>
+          </a:p>
+        </p:txBody>
+      </p:sp>
+      <p:sp>
+        <p:nvSpPr>
+          <p:cNvPr id="17" name="TextBox 16">
+            <a:extLst>
+              <a:ext uri="{FF2B5EF4-FFF2-40B4-BE49-F238E27FC236}">
+                <a16:creationId xmlns:a16="http://schemas.microsoft.com/office/drawing/2014/main" id="{A2BDFC54-52D3-1CC7-0794-2AB566E6EA00}"/>
+              </a:ext>
+            </a:extLst>
+          </p:cNvPr>
+          <p:cNvSpPr txBox="1"/>
+          <p:nvPr/>
+        </p:nvSpPr>
+        <p:spPr>
+          <a:xfrm>
+            <a:off x="314325" y="6055475"/>
+            <a:ext cx="2381250" cy="369332"/>
+          </a:xfrm>
+          <a:prstGeom prst="rect">
+            <a:avLst/>
+          </a:prstGeom>
+          <a:noFill/>
+        </p:spPr>
+        <p:txBody>
+          <a:bodyPr wrap="square" rtlCol="0">
+            <a:spAutoFit/>
+          </a:bodyPr>
+          <a:lstStyle/>
+          <a:p>
+            <a:r>
+              <a:rPr lang="en-GB" dirty="0"/>
+              <a:t>{{WORD_NUMBER}}</a:t>
+            </a:r>
+            <a:endParaRPr lang="en-IN" dirty="0"/>
+          </a:p>
+        </p:txBody>
+      </p:sp>
+      <p:sp>
+        <p:nvSpPr>
+          <p:cNvPr id="13" name="TextBox 12">
+            <a:extLst>
+              <a:ext uri="{FF2B5EF4-FFF2-40B4-BE49-F238E27FC236}">
+                <a16:creationId xmlns:a16="http://schemas.microsoft.com/office/drawing/2014/main" id="{1B52620E-AE51-05B1-BFE9-0843E5D61517}"/>
+              </a:ext>
+            </a:extLst>
+          </p:cNvPr>
+          <p:cNvSpPr txBox="1"/>
+          <p:nvPr/>
+        </p:nvSpPr>
+        <p:spPr>
+          <a:xfrm>
+            <a:off x="3191316" y="5312798"/>
+            <a:ext cx="2753032" cy="369332"/>
+          </a:xfrm>
+          <a:prstGeom prst="rect">
+            <a:avLst/>
+          </a:prstGeom>
+          <a:noFill/>
+        </p:spPr>
+        <p:txBody>
+          <a:bodyPr wrap="square" rtlCol="0">
+            <a:spAutoFit/>
+          </a:bodyPr>
+          <a:lstStyle/>
+          <a:p>
+            <a:r>
+              <a:rPr lang="en-GB" dirty="0"/>
+              <a:t>{{PRESENT_SENTENCE}}</a:t>
+            </a:r>
+            <a:endParaRPr lang="en-IN" dirty="0"/>
+          </a:p>
+        </p:txBody>
+      </p:sp>
+      <p:sp>
+        <p:nvSpPr>
+          <p:cNvPr id="20" name="TextBox 19">
+            <a:extLst>
+              <a:ext uri="{FF2B5EF4-FFF2-40B4-BE49-F238E27FC236}">
+                <a16:creationId xmlns:a16="http://schemas.microsoft.com/office/drawing/2014/main" id="{4799948D-503D-1BC8-A206-EA54AED1F16D}"/>
+              </a:ext>
+            </a:extLst>
+          </p:cNvPr>
+          <p:cNvSpPr txBox="1"/>
+          <p:nvPr/>
+        </p:nvSpPr>
+        <p:spPr>
+          <a:xfrm>
+            <a:off x="4276419" y="6006622"/>
+            <a:ext cx="2753032" cy="369332"/>
+          </a:xfrm>
+          <a:prstGeom prst="rect">
+            <a:avLst/>
+          </a:prstGeom>
+          <a:noFill/>
+        </p:spPr>
+        <p:txBody>
+          <a:bodyPr wrap="square" rtlCol="0">
+            <a:spAutoFit/>
+          </a:bodyPr>
+          <a:lstStyle/>
+          <a:p>
+            <a:r>
+              <a:rPr lang="en-GB" dirty="0"/>
+              <a:t>{{FUTURE_SENTENCE}}</a:t>
+            </a:r>
+            <a:endParaRPr lang="en-IN" dirty="0"/>
           </a:p>
         </p:txBody>
       </p:sp>

--- a/templates/vocabulary_template_v2.pptx
+++ b/templates/vocabulary_template_v2.pptx
@@ -305,7 +305,7 @@
           <a:p>
             <a:fld id="{5BCAD085-E8A6-8845-BD4E-CB4CCA059FC4}" type="datetimeFigureOut">
               <a:rPr lang="en-US" smtClean="0"/>
-              <a:t>7/30/2026</a:t>
+              <a:t>8/1/2026</a:t>
             </a:fld>
             <a:endParaRPr lang="en-US"/>
           </a:p>
@@ -473,7 +473,7 @@
           <a:p>
             <a:fld id="{5BCAD085-E8A6-8845-BD4E-CB4CCA059FC4}" type="datetimeFigureOut">
               <a:rPr lang="en-US" smtClean="0"/>
-              <a:t>7/30/2026</a:t>
+              <a:t>8/1/2026</a:t>
             </a:fld>
             <a:endParaRPr lang="en-US"/>
           </a:p>
@@ -651,7 +651,7 @@
           <a:p>
             <a:fld id="{5BCAD085-E8A6-8845-BD4E-CB4CCA059FC4}" type="datetimeFigureOut">
               <a:rPr lang="en-US" smtClean="0"/>
-              <a:t>7/30/2026</a:t>
+              <a:t>8/1/2026</a:t>
             </a:fld>
             <a:endParaRPr lang="en-US"/>
           </a:p>
@@ -819,7 +819,7 @@
           <a:p>
             <a:fld id="{5BCAD085-E8A6-8845-BD4E-CB4CCA059FC4}" type="datetimeFigureOut">
               <a:rPr lang="en-US" smtClean="0"/>
-              <a:t>7/30/2026</a:t>
+              <a:t>8/1/2026</a:t>
             </a:fld>
             <a:endParaRPr lang="en-US"/>
           </a:p>
@@ -1064,7 +1064,7 @@
           <a:p>
             <a:fld id="{5BCAD085-E8A6-8845-BD4E-CB4CCA059FC4}" type="datetimeFigureOut">
               <a:rPr lang="en-US" smtClean="0"/>
-              <a:t>7/30/2026</a:t>
+              <a:t>8/1/2026</a:t>
             </a:fld>
             <a:endParaRPr lang="en-US"/>
           </a:p>
@@ -1349,7 +1349,7 @@
           <a:p>
             <a:fld id="{5BCAD085-E8A6-8845-BD4E-CB4CCA059FC4}" type="datetimeFigureOut">
               <a:rPr lang="en-US" smtClean="0"/>
-              <a:t>7/30/2026</a:t>
+              <a:t>8/1/2026</a:t>
             </a:fld>
             <a:endParaRPr lang="en-US"/>
           </a:p>
@@ -1768,7 +1768,7 @@
           <a:p>
             <a:fld id="{5BCAD085-E8A6-8845-BD4E-CB4CCA059FC4}" type="datetimeFigureOut">
               <a:rPr lang="en-US" smtClean="0"/>
-              <a:t>7/30/2026</a:t>
+              <a:t>8/1/2026</a:t>
             </a:fld>
             <a:endParaRPr lang="en-US"/>
           </a:p>
@@ -1885,7 +1885,7 @@
           <a:p>
             <a:fld id="{5BCAD085-E8A6-8845-BD4E-CB4CCA059FC4}" type="datetimeFigureOut">
               <a:rPr lang="en-US" smtClean="0"/>
-              <a:t>7/30/2026</a:t>
+              <a:t>8/1/2026</a:t>
             </a:fld>
             <a:endParaRPr lang="en-US"/>
           </a:p>
@@ -1980,7 +1980,7 @@
           <a:p>
             <a:fld id="{5BCAD085-E8A6-8845-BD4E-CB4CCA059FC4}" type="datetimeFigureOut">
               <a:rPr lang="en-US" smtClean="0"/>
-              <a:t>7/30/2026</a:t>
+              <a:t>8/1/2026</a:t>
             </a:fld>
             <a:endParaRPr lang="en-US"/>
           </a:p>
@@ -2255,7 +2255,7 @@
           <a:p>
             <a:fld id="{5BCAD085-E8A6-8845-BD4E-CB4CCA059FC4}" type="datetimeFigureOut">
               <a:rPr lang="en-US" smtClean="0"/>
-              <a:t>7/30/2026</a:t>
+              <a:t>8/1/2026</a:t>
             </a:fld>
             <a:endParaRPr lang="en-US"/>
           </a:p>
@@ -2507,7 +2507,7 @@
           <a:p>
             <a:fld id="{5BCAD085-E8A6-8845-BD4E-CB4CCA059FC4}" type="datetimeFigureOut">
               <a:rPr lang="en-US" smtClean="0"/>
-              <a:t>7/30/2026</a:t>
+              <a:t>8/1/2026</a:t>
             </a:fld>
             <a:endParaRPr lang="en-US"/>
           </a:p>
@@ -2718,7 +2718,7 @@
           <a:p>
             <a:fld id="{5BCAD085-E8A6-8845-BD4E-CB4CCA059FC4}" type="datetimeFigureOut">
               <a:rPr lang="en-US" smtClean="0"/>
-              <a:t>7/30/2026</a:t>
+              <a:t>8/1/2026</a:t>
             </a:fld>
             <a:endParaRPr lang="en-US"/>
           </a:p>
@@ -3149,42 +3149,6 @@
           <a:p>
             <a:pPr algn="ctr"/>
             <a:r>
-              <a:rPr lang="en-GB" sz="1500" b="0" i="0" u="none" dirty="0">
-                <a:solidFill>
-                  <a:srgbClr val="64748B"/>
-                </a:solidFill>
-                <a:latin typeface="Poppins SemiBold"/>
-              </a:rPr>
-              <a:t>{{</a:t>
-            </a:r>
-            <a:r>
-              <a:rPr lang="en-GB" sz="1500" dirty="0">
-                <a:solidFill>
-                  <a:srgbClr val="64748B"/>
-                </a:solidFill>
-                <a:latin typeface="Poppins SemiBold"/>
-              </a:rPr>
-              <a:t>WORD_NUMBER</a:t>
-            </a:r>
-            <a:r>
-              <a:rPr lang="en-GB" sz="1500" b="0" i="0" u="none" dirty="0">
-                <a:solidFill>
-                  <a:srgbClr val="64748B"/>
-                </a:solidFill>
-                <a:latin typeface="Poppins SemiBold"/>
-              </a:rPr>
-              <a:t>}}</a:t>
-            </a:r>
-            <a:r>
-              <a:rPr sz="1500" b="0" i="0" u="none" dirty="0">
-                <a:solidFill>
-                  <a:srgbClr val="64748B"/>
-                </a:solidFill>
-                <a:latin typeface="Poppins SemiBold"/>
-              </a:rPr>
-              <a:t> </a:t>
-            </a:r>
-            <a:r>
               <a:rPr sz="1500" b="0" i="0" u="none" dirty="0">
                 <a:solidFill>
                   <a:srgbClr val="2563EB"/>
@@ -3253,7 +3217,7 @@
         <p:spPr>
           <a:xfrm>
             <a:off x="5869858" y="380999"/>
-            <a:ext cx="5781368" cy="1171475"/>
+            <a:ext cx="5781368" cy="1112228"/>
           </a:xfrm>
           <a:prstGeom prst="rect">
             <a:avLst/>
@@ -3272,7 +3236,7 @@
               </a:lnSpc>
             </a:pPr>
             <a:r>
-              <a:rPr lang="en-GB" sz="7400" b="0" i="0" u="none" dirty="0">
+              <a:rPr lang="en-GB" sz="6600" b="0" i="0" u="none" dirty="0">
                 <a:solidFill>
                   <a:srgbClr val="0F172A"/>
                 </a:solidFill>
@@ -3280,7 +3244,7 @@
               </a:rPr>
               <a:t>{{WORD}}</a:t>
             </a:r>
-            <a:endParaRPr sz="7400" b="0" i="0" u="none" dirty="0">
+            <a:endParaRPr sz="6600" b="0" i="0" u="none" dirty="0">
               <a:solidFill>
                 <a:srgbClr val="0F172A"/>
               </a:solidFill>
@@ -3298,7 +3262,7 @@
         <p:spPr>
           <a:xfrm>
             <a:off x="5652935" y="1760255"/>
-            <a:ext cx="5998291" cy="415498"/>
+            <a:ext cx="5998291" cy="307777"/>
           </a:xfrm>
           <a:prstGeom prst="rect">
             <a:avLst/>
@@ -3313,7 +3277,7 @@
           <a:p>
             <a:pPr algn="ctr"/>
             <a:r>
-              <a:rPr lang="en-GB" sz="2700" b="1" i="0" u="none" dirty="0">
+              <a:rPr lang="en-GB" sz="2000" b="1" i="0" u="none" dirty="0">
                 <a:solidFill>
                   <a:srgbClr val="1E293B"/>
                 </a:solidFill>
@@ -3321,174 +3285,11 @@
               </a:rPr>
               <a:t>{{MEANING}}</a:t>
             </a:r>
-            <a:endParaRPr sz="2700" b="1" i="0" u="none" dirty="0">
+            <a:endParaRPr sz="2000" b="1" i="0" u="none" dirty="0">
               <a:solidFill>
                 <a:srgbClr val="1E293B"/>
               </a:solidFill>
               <a:latin typeface="Poppins"/>
-            </a:endParaRPr>
-          </a:p>
-        </p:txBody>
-      </p:sp>
-      <p:sp>
-        <p:nvSpPr>
-          <p:cNvPr id="9" name="TextBox 8"/>
-          <p:cNvSpPr txBox="1"/>
-          <p:nvPr/>
-        </p:nvSpPr>
-        <p:spPr>
-          <a:xfrm>
-            <a:off x="4889704" y="2383534"/>
-            <a:ext cx="3806620" cy="1371600"/>
-          </a:xfrm>
-          <a:prstGeom prst="rect">
-            <a:avLst/>
-          </a:prstGeom>
-          <a:noFill/>
-        </p:spPr>
-        <p:txBody>
-          <a:bodyPr wrap="square" lIns="0" tIns="0" rIns="0" bIns="0" anchor="t">
-            <a:spAutoFit/>
-          </a:bodyPr>
-          <a:lstStyle/>
-          <a:p>
-            <a:pPr algn="ctr">
-              <a:lnSpc>
-                <a:spcPts val="3600"/>
-              </a:lnSpc>
-            </a:pPr>
-            <a:r>
-              <a:rPr lang="en-GB" sz="2400" b="0" i="0" u="none" dirty="0">
-                <a:solidFill>
-                  <a:srgbClr val="475569"/>
-                </a:solidFill>
-                <a:latin typeface="Noto Sans SemiBold"/>
-              </a:rPr>
-              <a:t>{{</a:t>
-            </a:r>
-            <a:r>
-              <a:rPr lang="en-GB" sz="2400" dirty="0">
-                <a:solidFill>
-                  <a:srgbClr val="475569"/>
-                </a:solidFill>
-                <a:latin typeface="Noto Sans SemiBold"/>
-              </a:rPr>
-              <a:t>HINDI</a:t>
-            </a:r>
-            <a:r>
-              <a:rPr lang="en-GB" sz="2400" b="0" i="0" u="none" dirty="0">
-                <a:solidFill>
-                  <a:srgbClr val="475569"/>
-                </a:solidFill>
-                <a:latin typeface="Noto Sans SemiBold"/>
-              </a:rPr>
-              <a:t>}}</a:t>
-            </a:r>
-            <a:r>
-              <a:rPr sz="2400" b="0" i="0" u="none" dirty="0">
-                <a:solidFill>
-                  <a:srgbClr val="475569"/>
-                </a:solidFill>
-                <a:latin typeface="Noto Sans SemiBold"/>
-              </a:rPr>
-              <a:t>,</a:t>
-            </a:r>
-            <a:r>
-              <a:rPr dirty="0"/>
-              <a:t>
-</a:t>
-            </a:r>
-            <a:r>
-              <a:rPr sz="2400" b="0" i="0" u="none" dirty="0">
-                <a:solidFill>
-                  <a:srgbClr val="475569"/>
-                </a:solidFill>
-                <a:latin typeface="Noto Sans SemiBold"/>
-              </a:rPr>
-              <a:t> </a:t>
-            </a:r>
-            <a:r>
-              <a:rPr lang="en-GB" sz="2400" b="0" i="0" u="none" dirty="0">
-                <a:solidFill>
-                  <a:srgbClr val="475569"/>
-                </a:solidFill>
-                <a:latin typeface="Noto Sans SemiBold"/>
-              </a:rPr>
-              <a:t>{{</a:t>
-            </a:r>
-            <a:r>
-              <a:rPr lang="en-GB" sz="2400" dirty="0">
-                <a:solidFill>
-                  <a:srgbClr val="475569"/>
-                </a:solidFill>
-                <a:latin typeface="Noto Sans SemiBold"/>
-              </a:rPr>
-              <a:t>MALAYALAM</a:t>
-            </a:r>
-            <a:r>
-              <a:rPr lang="en-GB" sz="2400" b="0" i="0" u="none" dirty="0">
-                <a:solidFill>
-                  <a:srgbClr val="475569"/>
-                </a:solidFill>
-                <a:latin typeface="Noto Sans SemiBold"/>
-              </a:rPr>
-              <a:t>}}</a:t>
-            </a:r>
-            <a:r>
-              <a:rPr sz="2400" b="0" i="0" u="none" dirty="0">
-                <a:solidFill>
-                  <a:srgbClr val="475569"/>
-                </a:solidFill>
-                <a:latin typeface="Noto Sans SemiBold"/>
-              </a:rPr>
-              <a:t>,</a:t>
-            </a:r>
-            <a:r>
-              <a:rPr dirty="0"/>
-              <a:t>
-</a:t>
-            </a:r>
-            <a:r>
-              <a:rPr sz="2400" b="0" i="0" u="none" dirty="0">
-                <a:solidFill>
-                  <a:srgbClr val="475569"/>
-                </a:solidFill>
-                <a:latin typeface="Noto Sans SemiBold"/>
-              </a:rPr>
-              <a:t> </a:t>
-            </a:r>
-            <a:r>
-              <a:rPr lang="en-GB" sz="2400" b="0" i="0" u="none" dirty="0">
-                <a:solidFill>
-                  <a:srgbClr val="475569"/>
-                </a:solidFill>
-                <a:latin typeface="Noto Sans SemiBold"/>
-              </a:rPr>
-              <a:t>{{</a:t>
-            </a:r>
-            <a:r>
-              <a:rPr lang="en-GB" sz="2400" dirty="0">
-                <a:solidFill>
-                  <a:srgbClr val="475569"/>
-                </a:solidFill>
-                <a:latin typeface="Noto Sans SemiBold"/>
-              </a:rPr>
-              <a:t>TAMIL</a:t>
-            </a:r>
-            <a:r>
-              <a:rPr lang="en-GB" sz="2400" b="0" i="0" u="none" dirty="0">
-                <a:solidFill>
-                  <a:srgbClr val="475569"/>
-                </a:solidFill>
-                <a:latin typeface="Noto Sans SemiBold"/>
-              </a:rPr>
-              <a:t>}}</a:t>
-            </a:r>
-            <a:endParaRPr sz="2400" b="0" i="0" u="none" dirty="0">
-              <a:solidFill>
-                <a:srgbClr val="475569"/>
-              </a:solidFill>
-              <a:latin typeface="Noto Sans SemiBold"/>
             </a:endParaRPr>
           </a:p>
         </p:txBody>
@@ -3664,8 +3465,8 @@
         </p:nvSpPr>
         <p:spPr>
           <a:xfrm>
-            <a:off x="4123470" y="1605828"/>
-            <a:ext cx="2190750" cy="923330"/>
+            <a:off x="4567832" y="2392569"/>
+            <a:ext cx="4723651" cy="923330"/>
           </a:xfrm>
           <a:prstGeom prst="rect">
             <a:avLst/>
@@ -3680,17 +3481,44 @@
           <a:p>
             <a:pPr algn="ctr"/>
             <a:r>
-              <a:rPr lang="en-GB" b="1" dirty="0"/>
-              <a:t>{{HINDI}}, {{MALAYALAM}},</a:t>
+              <a:rPr lang="en-GB" b="1" dirty="0">
+                <a:solidFill>
+                  <a:srgbClr val="475569"/>
+                </a:solidFill>
+              </a:rPr>
+              <a:t>{{HINDI}},</a:t>
+            </a:r>
+          </a:p>
+          <a:p>
+            <a:pPr algn="ctr"/>
+            <a:r>
+              <a:rPr lang="en-GB" b="1" dirty="0">
+                <a:solidFill>
+                  <a:srgbClr val="475569"/>
+                </a:solidFill>
+              </a:rPr>
+              <a:t> {{MALAYALAM}},</a:t>
             </a:r>
             <a:br>
-              <a:rPr lang="en-GB" b="1" dirty="0"/>
+              <a:rPr lang="en-GB" b="1" dirty="0">
+                <a:solidFill>
+                  <a:srgbClr val="475569"/>
+                </a:solidFill>
+              </a:rPr>
             </a:br>
             <a:r>
-              <a:rPr lang="en-GB" b="1" dirty="0"/>
+              <a:rPr lang="en-GB" b="1" dirty="0">
+                <a:solidFill>
+                  <a:srgbClr val="475569"/>
+                </a:solidFill>
+              </a:rPr>
               <a:t>{{TAMIL}}</a:t>
             </a:r>
-            <a:endParaRPr lang="en-IN" b="1" dirty="0"/>
+            <a:endParaRPr lang="en-IN" b="1" dirty="0">
+              <a:solidFill>
+                <a:srgbClr val="475569"/>
+              </a:solidFill>
+            </a:endParaRPr>
           </a:p>
         </p:txBody>
       </p:sp>
@@ -3723,10 +3551,18 @@
           <a:lstStyle/>
           <a:p>
             <a:r>
-              <a:rPr lang="en-GB" dirty="0"/>
+              <a:rPr lang="en-GB" b="1" dirty="0">
+                <a:solidFill>
+                  <a:srgbClr val="64748B"/>
+                </a:solidFill>
+              </a:rPr>
               <a:t>{{WORD_NUMBER}}</a:t>
             </a:r>
-            <a:endParaRPr lang="en-IN" dirty="0"/>
+            <a:endParaRPr lang="en-IN" b="1" dirty="0">
+              <a:solidFill>
+                <a:srgbClr val="64748B"/>
+              </a:solidFill>
+            </a:endParaRPr>
           </a:p>
         </p:txBody>
       </p:sp>
@@ -3876,42 +3712,6 @@
           <a:p>
             <a:pPr algn="ctr"/>
             <a:r>
-              <a:rPr lang="en-GB" sz="1500" b="0" i="0" u="none" dirty="0">
-                <a:solidFill>
-                  <a:srgbClr val="64748B"/>
-                </a:solidFill>
-                <a:latin typeface="Poppins SemiBold"/>
-              </a:rPr>
-              <a:t>{{</a:t>
-            </a:r>
-            <a:r>
-              <a:rPr lang="en-GB" sz="1500" dirty="0">
-                <a:solidFill>
-                  <a:srgbClr val="64748B"/>
-                </a:solidFill>
-                <a:latin typeface="Poppins SemiBold"/>
-              </a:rPr>
-              <a:t>WORD_NUMBER</a:t>
-            </a:r>
-            <a:r>
-              <a:rPr lang="en-GB" sz="1500" b="0" i="0" u="none" dirty="0">
-                <a:solidFill>
-                  <a:srgbClr val="64748B"/>
-                </a:solidFill>
-                <a:latin typeface="Poppins SemiBold"/>
-              </a:rPr>
-              <a:t>}}</a:t>
-            </a:r>
-            <a:r>
-              <a:rPr sz="1500" b="0" i="0" u="none" dirty="0">
-                <a:solidFill>
-                  <a:srgbClr val="64748B"/>
-                </a:solidFill>
-                <a:latin typeface="Poppins SemiBold"/>
-              </a:rPr>
-              <a:t> </a:t>
-            </a:r>
-            <a:r>
               <a:rPr sz="1500" b="0" i="0" u="none" dirty="0">
                 <a:solidFill>
                   <a:srgbClr val="2563EB"/>
@@ -4045,7 +3845,7 @@
         <p:spPr>
           <a:xfrm>
             <a:off x="5869858" y="380999"/>
-            <a:ext cx="5781368" cy="1171475"/>
+            <a:ext cx="5781368" cy="1112228"/>
           </a:xfrm>
           <a:prstGeom prst="rect">
             <a:avLst/>
@@ -4064,7 +3864,7 @@
               </a:lnSpc>
             </a:pPr>
             <a:r>
-              <a:rPr lang="en-GB" sz="7400" b="0" i="0" u="none" dirty="0">
+              <a:rPr lang="en-GB" sz="6600" b="0" i="0" u="none" dirty="0">
                 <a:solidFill>
                   <a:srgbClr val="0F172A"/>
                 </a:solidFill>
@@ -4072,7 +3872,7 @@
               </a:rPr>
               <a:t>{{WORD}}</a:t>
             </a:r>
-            <a:endParaRPr sz="7400" b="0" i="0" u="none" dirty="0">
+            <a:endParaRPr sz="6600" b="0" i="0" u="none" dirty="0">
               <a:solidFill>
                 <a:srgbClr val="0F172A"/>
               </a:solidFill>
@@ -4096,7 +3896,7 @@
         <p:spPr>
           <a:xfrm>
             <a:off x="5652935" y="1760255"/>
-            <a:ext cx="5998291" cy="415498"/>
+            <a:ext cx="5998291" cy="307777"/>
           </a:xfrm>
           <a:prstGeom prst="rect">
             <a:avLst/>
@@ -4111,7 +3911,7 @@
           <a:p>
             <a:pPr algn="ctr"/>
             <a:r>
-              <a:rPr lang="en-GB" sz="2700" b="1" i="0" u="none" dirty="0">
+              <a:rPr lang="en-GB" sz="2000" b="1" i="0" u="none" dirty="0">
                 <a:solidFill>
                   <a:srgbClr val="1E293B"/>
                 </a:solidFill>
@@ -4119,180 +3919,11 @@
               </a:rPr>
               <a:t>{{MEANING}}</a:t>
             </a:r>
-            <a:endParaRPr sz="2700" b="1" i="0" u="none" dirty="0">
+            <a:endParaRPr sz="2000" b="1" i="0" u="none" dirty="0">
               <a:solidFill>
                 <a:srgbClr val="1E293B"/>
               </a:solidFill>
               <a:latin typeface="Poppins"/>
-            </a:endParaRPr>
-          </a:p>
-        </p:txBody>
-      </p:sp>
-      <p:sp>
-        <p:nvSpPr>
-          <p:cNvPr id="9" name="TextBox 8">
-            <a:extLst>
-              <a:ext uri="{FF2B5EF4-FFF2-40B4-BE49-F238E27FC236}">
-                <a16:creationId xmlns:a16="http://schemas.microsoft.com/office/drawing/2014/main" id="{48E7B741-9FAC-7692-E721-B00547766DB9}"/>
-              </a:ext>
-            </a:extLst>
-          </p:cNvPr>
-          <p:cNvSpPr txBox="1"/>
-          <p:nvPr/>
-        </p:nvSpPr>
-        <p:spPr>
-          <a:xfrm>
-            <a:off x="4889704" y="2383534"/>
-            <a:ext cx="3806620" cy="1371600"/>
-          </a:xfrm>
-          <a:prstGeom prst="rect">
-            <a:avLst/>
-          </a:prstGeom>
-          <a:noFill/>
-        </p:spPr>
-        <p:txBody>
-          <a:bodyPr wrap="square" lIns="0" tIns="0" rIns="0" bIns="0" anchor="t">
-            <a:spAutoFit/>
-          </a:bodyPr>
-          <a:lstStyle/>
-          <a:p>
-            <a:pPr algn="ctr">
-              <a:lnSpc>
-                <a:spcPts val="3600"/>
-              </a:lnSpc>
-            </a:pPr>
-            <a:r>
-              <a:rPr lang="en-GB" sz="2400" b="0" i="0" u="none" dirty="0">
-                <a:solidFill>
-                  <a:srgbClr val="475569"/>
-                </a:solidFill>
-                <a:latin typeface="Noto Sans SemiBold"/>
-              </a:rPr>
-              <a:t>{{</a:t>
-            </a:r>
-            <a:r>
-              <a:rPr lang="en-GB" sz="2400" dirty="0">
-                <a:solidFill>
-                  <a:srgbClr val="475569"/>
-                </a:solidFill>
-                <a:latin typeface="Noto Sans SemiBold"/>
-              </a:rPr>
-              <a:t>HINDI</a:t>
-            </a:r>
-            <a:r>
-              <a:rPr lang="en-GB" sz="2400" b="0" i="0" u="none" dirty="0">
-                <a:solidFill>
-                  <a:srgbClr val="475569"/>
-                </a:solidFill>
-                <a:latin typeface="Noto Sans SemiBold"/>
-              </a:rPr>
-              <a:t>}}</a:t>
-            </a:r>
-            <a:r>
-              <a:rPr sz="2400" b="0" i="0" u="none" dirty="0">
-                <a:solidFill>
-                  <a:srgbClr val="475569"/>
-                </a:solidFill>
-                <a:latin typeface="Noto Sans SemiBold"/>
-              </a:rPr>
-              <a:t>,</a:t>
-            </a:r>
-            <a:r>
-              <a:rPr dirty="0"/>
-              <a:t>
-</a:t>
-            </a:r>
-            <a:r>
-              <a:rPr sz="2400" b="0" i="0" u="none" dirty="0">
-                <a:solidFill>
-                  <a:srgbClr val="475569"/>
-                </a:solidFill>
-                <a:latin typeface="Noto Sans SemiBold"/>
-              </a:rPr>
-              <a:t> </a:t>
-            </a:r>
-            <a:r>
-              <a:rPr lang="en-GB" sz="2400" b="0" i="0" u="none" dirty="0">
-                <a:solidFill>
-                  <a:srgbClr val="475569"/>
-                </a:solidFill>
-                <a:latin typeface="Noto Sans SemiBold"/>
-              </a:rPr>
-              <a:t>{{</a:t>
-            </a:r>
-            <a:r>
-              <a:rPr lang="en-GB" sz="2400" dirty="0">
-                <a:solidFill>
-                  <a:srgbClr val="475569"/>
-                </a:solidFill>
-                <a:latin typeface="Noto Sans SemiBold"/>
-              </a:rPr>
-              <a:t>MALAYALAM</a:t>
-            </a:r>
-            <a:r>
-              <a:rPr lang="en-GB" sz="2400" b="0" i="0" u="none" dirty="0">
-                <a:solidFill>
-                  <a:srgbClr val="475569"/>
-                </a:solidFill>
-                <a:latin typeface="Noto Sans SemiBold"/>
-              </a:rPr>
-              <a:t>}}</a:t>
-            </a:r>
-            <a:r>
-              <a:rPr sz="2400" b="0" i="0" u="none" dirty="0">
-                <a:solidFill>
-                  <a:srgbClr val="475569"/>
-                </a:solidFill>
-                <a:latin typeface="Noto Sans SemiBold"/>
-              </a:rPr>
-              <a:t>,</a:t>
-            </a:r>
-            <a:r>
-              <a:rPr dirty="0"/>
-              <a:t>
-</a:t>
-            </a:r>
-            <a:r>
-              <a:rPr sz="2400" b="0" i="0" u="none" dirty="0">
-                <a:solidFill>
-                  <a:srgbClr val="475569"/>
-                </a:solidFill>
-                <a:latin typeface="Noto Sans SemiBold"/>
-              </a:rPr>
-              <a:t> </a:t>
-            </a:r>
-            <a:r>
-              <a:rPr lang="en-GB" sz="2400" b="0" i="0" u="none" dirty="0">
-                <a:solidFill>
-                  <a:srgbClr val="475569"/>
-                </a:solidFill>
-                <a:latin typeface="Noto Sans SemiBold"/>
-              </a:rPr>
-              <a:t>{{</a:t>
-            </a:r>
-            <a:r>
-              <a:rPr lang="en-GB" sz="2400" dirty="0">
-                <a:solidFill>
-                  <a:srgbClr val="475569"/>
-                </a:solidFill>
-                <a:latin typeface="Noto Sans SemiBold"/>
-              </a:rPr>
-              <a:t>TAMIL</a:t>
-            </a:r>
-            <a:r>
-              <a:rPr lang="en-GB" sz="2400" b="0" i="0" u="none" dirty="0">
-                <a:solidFill>
-                  <a:srgbClr val="475569"/>
-                </a:solidFill>
-                <a:latin typeface="Noto Sans SemiBold"/>
-              </a:rPr>
-              <a:t>}}</a:t>
-            </a:r>
-            <a:endParaRPr sz="2400" b="0" i="0" u="none" dirty="0">
-              <a:solidFill>
-                <a:srgbClr val="475569"/>
-              </a:solidFill>
-              <a:latin typeface="Noto Sans SemiBold"/>
             </a:endParaRPr>
           </a:p>
         </p:txBody>
@@ -4502,10 +4133,10 @@
       </p:sp>
       <p:sp>
         <p:nvSpPr>
-          <p:cNvPr id="13" name="TextBox 12">
+          <p:cNvPr id="17" name="TextBox 16">
             <a:extLst>
               <a:ext uri="{FF2B5EF4-FFF2-40B4-BE49-F238E27FC236}">
-                <a16:creationId xmlns:a16="http://schemas.microsoft.com/office/drawing/2014/main" id="{905DD7DE-7D39-D652-3399-C6F0644DC3D3}"/>
+                <a16:creationId xmlns:a16="http://schemas.microsoft.com/office/drawing/2014/main" id="{AA70CE9C-16FA-6AB7-2AEC-05853ABB59B8}"/>
               </a:ext>
             </a:extLst>
           </p:cNvPr>
@@ -4514,8 +4145,8 @@
         </p:nvSpPr>
         <p:spPr>
           <a:xfrm>
-            <a:off x="4819651" y="4057650"/>
-            <a:ext cx="2190750" cy="923330"/>
+            <a:off x="314325" y="6055475"/>
+            <a:ext cx="2381250" cy="369332"/>
           </a:xfrm>
           <a:prstGeom prst="rect">
             <a:avLst/>
@@ -4528,28 +4159,28 @@
           </a:bodyPr>
           <a:lstStyle/>
           <a:p>
-            <a:pPr algn="ctr"/>
-            <a:r>
-              <a:rPr lang="en-GB" b="1" dirty="0"/>
-              <a:t>{{HINDI}}, {{MALAYALAM}},</a:t>
-            </a:r>
-            <a:br>
-              <a:rPr lang="en-GB" b="1" dirty="0"/>
-            </a:br>
-            <a:r>
-              <a:rPr lang="en-GB" b="1" dirty="0"/>
-              <a:t>{{TAMIL}}</a:t>
-            </a:r>
-            <a:endParaRPr lang="en-IN" b="1" dirty="0"/>
-          </a:p>
-        </p:txBody>
-      </p:sp>
-      <p:sp>
-        <p:nvSpPr>
-          <p:cNvPr id="14" name="TextBox 13">
+            <a:r>
+              <a:rPr lang="en-GB" b="1" dirty="0">
+                <a:solidFill>
+                  <a:srgbClr val="64748B"/>
+                </a:solidFill>
+              </a:rPr>
+              <a:t>{{WORD_NUMBER}}</a:t>
+            </a:r>
+            <a:endParaRPr lang="en-IN" b="1" dirty="0">
+              <a:solidFill>
+                <a:srgbClr val="64748B"/>
+              </a:solidFill>
+            </a:endParaRPr>
+          </a:p>
+        </p:txBody>
+      </p:sp>
+      <p:sp>
+        <p:nvSpPr>
+          <p:cNvPr id="19" name="TextBox 18">
             <a:extLst>
               <a:ext uri="{FF2B5EF4-FFF2-40B4-BE49-F238E27FC236}">
-                <a16:creationId xmlns:a16="http://schemas.microsoft.com/office/drawing/2014/main" id="{297F8D2F-B09A-B1B4-583C-48301F7AAEF1}"/>
+                <a16:creationId xmlns:a16="http://schemas.microsoft.com/office/drawing/2014/main" id="{56F94828-D644-2796-92D6-FAF160DB0C25}"/>
               </a:ext>
             </a:extLst>
           </p:cNvPr>
@@ -4558,8 +4189,8 @@
         </p:nvSpPr>
         <p:spPr>
           <a:xfrm>
-            <a:off x="314325" y="6055475"/>
-            <a:ext cx="2381250" cy="369332"/>
+            <a:off x="4567832" y="2392569"/>
+            <a:ext cx="4723651" cy="923330"/>
           </a:xfrm>
           <a:prstGeom prst="rect">
             <a:avLst/>
@@ -4572,11 +4203,46 @@
           </a:bodyPr>
           <a:lstStyle/>
           <a:p>
-            <a:r>
-              <a:rPr lang="en-GB" dirty="0"/>
-              <a:t>{{WORD_NUMBER}}</a:t>
-            </a:r>
-            <a:endParaRPr lang="en-IN" dirty="0"/>
+            <a:pPr algn="ctr"/>
+            <a:r>
+              <a:rPr lang="en-GB" b="1" dirty="0">
+                <a:solidFill>
+                  <a:srgbClr val="475569"/>
+                </a:solidFill>
+              </a:rPr>
+              <a:t>{{HINDI}},</a:t>
+            </a:r>
+          </a:p>
+          <a:p>
+            <a:pPr algn="ctr"/>
+            <a:r>
+              <a:rPr lang="en-GB" b="1" dirty="0">
+                <a:solidFill>
+                  <a:srgbClr val="475569"/>
+                </a:solidFill>
+              </a:rPr>
+              <a:t> {{MALAYALAM}},</a:t>
+            </a:r>
+            <a:br>
+              <a:rPr lang="en-GB" b="1" dirty="0">
+                <a:solidFill>
+                  <a:srgbClr val="475569"/>
+                </a:solidFill>
+              </a:rPr>
+            </a:br>
+            <a:r>
+              <a:rPr lang="en-GB" b="1" dirty="0">
+                <a:solidFill>
+                  <a:srgbClr val="475569"/>
+                </a:solidFill>
+              </a:rPr>
+              <a:t>{{TAMIL}}</a:t>
+            </a:r>
+            <a:endParaRPr lang="en-IN" b="1" dirty="0">
+              <a:solidFill>
+                <a:srgbClr val="475569"/>
+              </a:solidFill>
+            </a:endParaRPr>
           </a:p>
         </p:txBody>
       </p:sp>
@@ -4684,42 +4350,6 @@
           <a:p>
             <a:pPr algn="ctr"/>
             <a:r>
-              <a:rPr lang="en-GB" sz="1500" b="0" i="0" u="none" dirty="0">
-                <a:solidFill>
-                  <a:srgbClr val="64748B"/>
-                </a:solidFill>
-                <a:latin typeface="Poppins SemiBold"/>
-              </a:rPr>
-              <a:t>{{</a:t>
-            </a:r>
-            <a:r>
-              <a:rPr lang="en-GB" sz="1500" dirty="0">
-                <a:solidFill>
-                  <a:srgbClr val="64748B"/>
-                </a:solidFill>
-                <a:latin typeface="Poppins SemiBold"/>
-              </a:rPr>
-              <a:t>WORD_NUMBER</a:t>
-            </a:r>
-            <a:r>
-              <a:rPr lang="en-GB" sz="1500" b="0" i="0" u="none" dirty="0">
-                <a:solidFill>
-                  <a:srgbClr val="64748B"/>
-                </a:solidFill>
-                <a:latin typeface="Poppins SemiBold"/>
-              </a:rPr>
-              <a:t>}}</a:t>
-            </a:r>
-            <a:r>
-              <a:rPr sz="1500" b="0" i="0" u="none" dirty="0">
-                <a:solidFill>
-                  <a:srgbClr val="64748B"/>
-                </a:solidFill>
-                <a:latin typeface="Poppins SemiBold"/>
-              </a:rPr>
-              <a:t> </a:t>
-            </a:r>
-            <a:r>
               <a:rPr sz="1500" b="0" i="0" u="none" dirty="0">
                 <a:solidFill>
                   <a:srgbClr val="2563EB"/>
@@ -4853,7 +4483,7 @@
         <p:spPr>
           <a:xfrm>
             <a:off x="5869858" y="380999"/>
-            <a:ext cx="5781368" cy="1171475"/>
+            <a:ext cx="5781368" cy="1112228"/>
           </a:xfrm>
           <a:prstGeom prst="rect">
             <a:avLst/>
@@ -4872,7 +4502,7 @@
               </a:lnSpc>
             </a:pPr>
             <a:r>
-              <a:rPr lang="en-GB" sz="7400" b="0" i="0" u="none" dirty="0">
+              <a:rPr lang="en-GB" sz="6600" b="0" i="0" u="none" dirty="0">
                 <a:solidFill>
                   <a:srgbClr val="0F172A"/>
                 </a:solidFill>
@@ -4880,7 +4510,7 @@
               </a:rPr>
               <a:t>{{WORD}}</a:t>
             </a:r>
-            <a:endParaRPr sz="7400" b="0" i="0" u="none" dirty="0">
+            <a:endParaRPr sz="6600" b="0" i="0" u="none" dirty="0">
               <a:solidFill>
                 <a:srgbClr val="0F172A"/>
               </a:solidFill>
@@ -4904,7 +4534,7 @@
         <p:spPr>
           <a:xfrm>
             <a:off x="5652935" y="1760255"/>
-            <a:ext cx="5998291" cy="415498"/>
+            <a:ext cx="5998291" cy="307777"/>
           </a:xfrm>
           <a:prstGeom prst="rect">
             <a:avLst/>
@@ -4919,7 +4549,7 @@
           <a:p>
             <a:pPr algn="ctr"/>
             <a:r>
-              <a:rPr lang="en-GB" sz="2700" b="1" i="0" u="none" dirty="0">
+              <a:rPr lang="en-GB" sz="2000" b="1" i="0" u="none" dirty="0">
                 <a:solidFill>
                   <a:srgbClr val="1E293B"/>
                 </a:solidFill>
@@ -4927,180 +4557,11 @@
               </a:rPr>
               <a:t>{{MEANING}}</a:t>
             </a:r>
-            <a:endParaRPr sz="2700" b="1" i="0" u="none" dirty="0">
+            <a:endParaRPr sz="2000" b="1" i="0" u="none" dirty="0">
               <a:solidFill>
                 <a:srgbClr val="1E293B"/>
               </a:solidFill>
               <a:latin typeface="Poppins"/>
-            </a:endParaRPr>
-          </a:p>
-        </p:txBody>
-      </p:sp>
-      <p:sp>
-        <p:nvSpPr>
-          <p:cNvPr id="9" name="TextBox 8">
-            <a:extLst>
-              <a:ext uri="{FF2B5EF4-FFF2-40B4-BE49-F238E27FC236}">
-                <a16:creationId xmlns:a16="http://schemas.microsoft.com/office/drawing/2014/main" id="{3570A0D5-DCB6-EBC2-66DD-4D7987991A2E}"/>
-              </a:ext>
-            </a:extLst>
-          </p:cNvPr>
-          <p:cNvSpPr txBox="1"/>
-          <p:nvPr/>
-        </p:nvSpPr>
-        <p:spPr>
-          <a:xfrm>
-            <a:off x="4889704" y="2383534"/>
-            <a:ext cx="3806620" cy="1371600"/>
-          </a:xfrm>
-          <a:prstGeom prst="rect">
-            <a:avLst/>
-          </a:prstGeom>
-          <a:noFill/>
-        </p:spPr>
-        <p:txBody>
-          <a:bodyPr wrap="square" lIns="0" tIns="0" rIns="0" bIns="0" anchor="t">
-            <a:spAutoFit/>
-          </a:bodyPr>
-          <a:lstStyle/>
-          <a:p>
-            <a:pPr algn="ctr">
-              <a:lnSpc>
-                <a:spcPts val="3600"/>
-              </a:lnSpc>
-            </a:pPr>
-            <a:r>
-              <a:rPr lang="en-GB" sz="2400" b="0" i="0" u="none" dirty="0">
-                <a:solidFill>
-                  <a:srgbClr val="475569"/>
-                </a:solidFill>
-                <a:latin typeface="Noto Sans SemiBold"/>
-              </a:rPr>
-              <a:t>{{</a:t>
-            </a:r>
-            <a:r>
-              <a:rPr lang="en-GB" sz="2400" dirty="0">
-                <a:solidFill>
-                  <a:srgbClr val="475569"/>
-                </a:solidFill>
-                <a:latin typeface="Noto Sans SemiBold"/>
-              </a:rPr>
-              <a:t>HINDI</a:t>
-            </a:r>
-            <a:r>
-              <a:rPr lang="en-GB" sz="2400" b="0" i="0" u="none" dirty="0">
-                <a:solidFill>
-                  <a:srgbClr val="475569"/>
-                </a:solidFill>
-                <a:latin typeface="Noto Sans SemiBold"/>
-              </a:rPr>
-              <a:t>}}</a:t>
-            </a:r>
-            <a:r>
-              <a:rPr sz="2400" b="0" i="0" u="none" dirty="0">
-                <a:solidFill>
-                  <a:srgbClr val="475569"/>
-                </a:solidFill>
-                <a:latin typeface="Noto Sans SemiBold"/>
-              </a:rPr>
-              <a:t>,</a:t>
-            </a:r>
-            <a:r>
-              <a:rPr dirty="0"/>
-              <a:t>
-</a:t>
-            </a:r>
-            <a:r>
-              <a:rPr sz="2400" b="0" i="0" u="none" dirty="0">
-                <a:solidFill>
-                  <a:srgbClr val="475569"/>
-                </a:solidFill>
-                <a:latin typeface="Noto Sans SemiBold"/>
-              </a:rPr>
-              <a:t> </a:t>
-            </a:r>
-            <a:r>
-              <a:rPr lang="en-GB" sz="2400" b="0" i="0" u="none" dirty="0">
-                <a:solidFill>
-                  <a:srgbClr val="475569"/>
-                </a:solidFill>
-                <a:latin typeface="Noto Sans SemiBold"/>
-              </a:rPr>
-              <a:t>{{</a:t>
-            </a:r>
-            <a:r>
-              <a:rPr lang="en-GB" sz="2400" dirty="0">
-                <a:solidFill>
-                  <a:srgbClr val="475569"/>
-                </a:solidFill>
-                <a:latin typeface="Noto Sans SemiBold"/>
-              </a:rPr>
-              <a:t>MALAYALAM</a:t>
-            </a:r>
-            <a:r>
-              <a:rPr lang="en-GB" sz="2400" b="0" i="0" u="none" dirty="0">
-                <a:solidFill>
-                  <a:srgbClr val="475569"/>
-                </a:solidFill>
-                <a:latin typeface="Noto Sans SemiBold"/>
-              </a:rPr>
-              <a:t>}}</a:t>
-            </a:r>
-            <a:r>
-              <a:rPr sz="2400" b="0" i="0" u="none" dirty="0">
-                <a:solidFill>
-                  <a:srgbClr val="475569"/>
-                </a:solidFill>
-                <a:latin typeface="Noto Sans SemiBold"/>
-              </a:rPr>
-              <a:t>,</a:t>
-            </a:r>
-            <a:r>
-              <a:rPr dirty="0"/>
-              <a:t>
-</a:t>
-            </a:r>
-            <a:r>
-              <a:rPr sz="2400" b="0" i="0" u="none" dirty="0">
-                <a:solidFill>
-                  <a:srgbClr val="475569"/>
-                </a:solidFill>
-                <a:latin typeface="Noto Sans SemiBold"/>
-              </a:rPr>
-              <a:t> </a:t>
-            </a:r>
-            <a:r>
-              <a:rPr lang="en-GB" sz="2400" b="0" i="0" u="none" dirty="0">
-                <a:solidFill>
-                  <a:srgbClr val="475569"/>
-                </a:solidFill>
-                <a:latin typeface="Noto Sans SemiBold"/>
-              </a:rPr>
-              <a:t>{{</a:t>
-            </a:r>
-            <a:r>
-              <a:rPr lang="en-GB" sz="2400" dirty="0">
-                <a:solidFill>
-                  <a:srgbClr val="475569"/>
-                </a:solidFill>
-                <a:latin typeface="Noto Sans SemiBold"/>
-              </a:rPr>
-              <a:t>TAMIL</a:t>
-            </a:r>
-            <a:r>
-              <a:rPr lang="en-GB" sz="2400" b="0" i="0" u="none" dirty="0">
-                <a:solidFill>
-                  <a:srgbClr val="475569"/>
-                </a:solidFill>
-                <a:latin typeface="Noto Sans SemiBold"/>
-              </a:rPr>
-              <a:t>}}</a:t>
-            </a:r>
-            <a:endParaRPr sz="2400" b="0" i="0" u="none" dirty="0">
-              <a:solidFill>
-                <a:srgbClr val="475569"/>
-              </a:solidFill>
-              <a:latin typeface="Noto Sans SemiBold"/>
             </a:endParaRPr>
           </a:p>
         </p:txBody>
@@ -5310,10 +4771,10 @@
       </p:sp>
       <p:sp>
         <p:nvSpPr>
-          <p:cNvPr id="16" name="TextBox 15">
+          <p:cNvPr id="22" name="TextBox 21">
             <a:extLst>
               <a:ext uri="{FF2B5EF4-FFF2-40B4-BE49-F238E27FC236}">
-                <a16:creationId xmlns:a16="http://schemas.microsoft.com/office/drawing/2014/main" id="{867BCAC7-9746-3084-D20B-C02A99CD59B2}"/>
+                <a16:creationId xmlns:a16="http://schemas.microsoft.com/office/drawing/2014/main" id="{C5D4EDAF-AC6D-61E3-3AE8-5AF4B7AA566D}"/>
               </a:ext>
             </a:extLst>
           </p:cNvPr>
@@ -5322,8 +4783,8 @@
         </p:nvSpPr>
         <p:spPr>
           <a:xfrm>
-            <a:off x="2950292" y="4926131"/>
-            <a:ext cx="8774983" cy="369332"/>
+            <a:off x="2895599" y="4948361"/>
+            <a:ext cx="8667136" cy="461665"/>
           </a:xfrm>
           <a:prstGeom prst="rect">
             <a:avLst/>
@@ -5331,53 +4792,33 @@
           <a:noFill/>
         </p:spPr>
         <p:txBody>
-          <a:bodyPr wrap="square" lIns="0" tIns="0" rIns="0" bIns="0" anchor="t">
+          <a:bodyPr wrap="square" rtlCol="0">
             <a:spAutoFit/>
           </a:bodyPr>
           <a:lstStyle/>
           <a:p>
             <a:r>
-              <a:rPr lang="en-GB" sz="2400" b="0" i="0" u="none" dirty="0">
+              <a:rPr lang="en-GB" sz="2400" b="1" dirty="0">
                 <a:solidFill>
                   <a:srgbClr val="2A3644"/>
                 </a:solidFill>
-                <a:latin typeface="Poppins ExtraBold"/>
-              </a:rPr>
-              <a:t>{{</a:t>
-            </a:r>
-            <a:r>
-              <a:rPr lang="en-GB" sz="2400" dirty="0">
-                <a:solidFill>
-                  <a:srgbClr val="2A3644"/>
-                </a:solidFill>
-                <a:latin typeface="Poppins ExtraBold"/>
-              </a:rPr>
-              <a:t>PRESENT_SENTENCE</a:t>
-            </a:r>
-            <a:r>
-              <a:rPr lang="en-GB" sz="2400" b="0" i="0" u="none" dirty="0">
-                <a:solidFill>
-                  <a:srgbClr val="2A3644"/>
-                </a:solidFill>
-                <a:latin typeface="Poppins ExtraBold"/>
-              </a:rPr>
-              <a:t>}}</a:t>
-            </a:r>
-            <a:endParaRPr sz="2400" b="0" i="0" u="none" dirty="0">
+              </a:rPr>
+              <a:t>{{PRESENT_SENTENCE}}</a:t>
+            </a:r>
+            <a:endParaRPr lang="en-IN" sz="2400" b="1" dirty="0">
               <a:solidFill>
                 <a:srgbClr val="2A3644"/>
               </a:solidFill>
-              <a:latin typeface="Poppins ExtraBold"/>
             </a:endParaRPr>
           </a:p>
         </p:txBody>
       </p:sp>
       <p:sp>
         <p:nvSpPr>
-          <p:cNvPr id="13" name="TextBox 12">
+          <p:cNvPr id="10" name="TextBox 9">
             <a:extLst>
               <a:ext uri="{FF2B5EF4-FFF2-40B4-BE49-F238E27FC236}">
-                <a16:creationId xmlns:a16="http://schemas.microsoft.com/office/drawing/2014/main" id="{B1CB6EE9-A13A-C353-7C57-19E97573E6EC}"/>
+                <a16:creationId xmlns:a16="http://schemas.microsoft.com/office/drawing/2014/main" id="{59958E69-D62B-402C-537C-2585F5407329}"/>
               </a:ext>
             </a:extLst>
           </p:cNvPr>
@@ -5386,8 +4827,8 @@
         </p:nvSpPr>
         <p:spPr>
           <a:xfrm>
-            <a:off x="4819651" y="4057650"/>
-            <a:ext cx="2190750" cy="923330"/>
+            <a:off x="314325" y="6055475"/>
+            <a:ext cx="2381250" cy="369332"/>
           </a:xfrm>
           <a:prstGeom prst="rect">
             <a:avLst/>
@@ -5400,28 +4841,28 @@
           </a:bodyPr>
           <a:lstStyle/>
           <a:p>
-            <a:pPr algn="ctr"/>
-            <a:r>
-              <a:rPr lang="en-GB" b="1" dirty="0"/>
-              <a:t>{{HINDI}}, {{MALAYALAM}},</a:t>
-            </a:r>
-            <a:br>
-              <a:rPr lang="en-GB" b="1" dirty="0"/>
-            </a:br>
-            <a:r>
-              <a:rPr lang="en-GB" b="1" dirty="0"/>
-              <a:t>{{TAMIL}}</a:t>
-            </a:r>
-            <a:endParaRPr lang="en-IN" b="1" dirty="0"/>
-          </a:p>
-        </p:txBody>
-      </p:sp>
-      <p:sp>
-        <p:nvSpPr>
-          <p:cNvPr id="14" name="TextBox 13">
+            <a:r>
+              <a:rPr lang="en-GB" b="1" dirty="0">
+                <a:solidFill>
+                  <a:srgbClr val="64748B"/>
+                </a:solidFill>
+              </a:rPr>
+              <a:t>{{WORD_NUMBER}}</a:t>
+            </a:r>
+            <a:endParaRPr lang="en-IN" b="1" dirty="0">
+              <a:solidFill>
+                <a:srgbClr val="64748B"/>
+              </a:solidFill>
+            </a:endParaRPr>
+          </a:p>
+        </p:txBody>
+      </p:sp>
+      <p:sp>
+        <p:nvSpPr>
+          <p:cNvPr id="16" name="TextBox 15">
             <a:extLst>
               <a:ext uri="{FF2B5EF4-FFF2-40B4-BE49-F238E27FC236}">
-                <a16:creationId xmlns:a16="http://schemas.microsoft.com/office/drawing/2014/main" id="{DA549B56-9DFE-47C2-5021-87EA5CA59DD7}"/>
+                <a16:creationId xmlns:a16="http://schemas.microsoft.com/office/drawing/2014/main" id="{2D98B3D8-B85C-5D71-F240-2608622284BF}"/>
               </a:ext>
             </a:extLst>
           </p:cNvPr>
@@ -5430,8 +4871,8 @@
         </p:nvSpPr>
         <p:spPr>
           <a:xfrm>
-            <a:off x="314325" y="6055475"/>
-            <a:ext cx="2381250" cy="369332"/>
+            <a:off x="4567832" y="2392569"/>
+            <a:ext cx="4723651" cy="923330"/>
           </a:xfrm>
           <a:prstGeom prst="rect">
             <a:avLst/>
@@ -5444,47 +4885,46 @@
           </a:bodyPr>
           <a:lstStyle/>
           <a:p>
-            <a:r>
-              <a:rPr lang="en-GB" dirty="0"/>
-              <a:t>{{WORD_NUMBER}}</a:t>
-            </a:r>
-            <a:endParaRPr lang="en-IN" dirty="0"/>
-          </a:p>
-        </p:txBody>
-      </p:sp>
-      <p:sp>
-        <p:nvSpPr>
-          <p:cNvPr id="17" name="TextBox 16">
-            <a:extLst>
-              <a:ext uri="{FF2B5EF4-FFF2-40B4-BE49-F238E27FC236}">
-                <a16:creationId xmlns:a16="http://schemas.microsoft.com/office/drawing/2014/main" id="{740F27BC-5AF1-DB1A-0866-514662520B18}"/>
-              </a:ext>
-            </a:extLst>
-          </p:cNvPr>
-          <p:cNvSpPr txBox="1"/>
-          <p:nvPr/>
-        </p:nvSpPr>
-        <p:spPr>
-          <a:xfrm>
-            <a:off x="3343716" y="5465198"/>
-            <a:ext cx="2753032" cy="369332"/>
-          </a:xfrm>
-          <a:prstGeom prst="rect">
-            <a:avLst/>
-          </a:prstGeom>
-          <a:noFill/>
-        </p:spPr>
-        <p:txBody>
-          <a:bodyPr wrap="square" rtlCol="0">
-            <a:spAutoFit/>
-          </a:bodyPr>
-          <a:lstStyle/>
-          <a:p>
-            <a:r>
-              <a:rPr lang="en-GB" dirty="0"/>
-              <a:t>{{PRESENT_SENTENCE}}</a:t>
-            </a:r>
-            <a:endParaRPr lang="en-IN" dirty="0"/>
+            <a:pPr algn="ctr"/>
+            <a:r>
+              <a:rPr lang="en-GB" b="1" dirty="0">
+                <a:solidFill>
+                  <a:srgbClr val="475569"/>
+                </a:solidFill>
+              </a:rPr>
+              <a:t>{{HINDI}},</a:t>
+            </a:r>
+          </a:p>
+          <a:p>
+            <a:pPr algn="ctr"/>
+            <a:r>
+              <a:rPr lang="en-GB" b="1" dirty="0">
+                <a:solidFill>
+                  <a:srgbClr val="475569"/>
+                </a:solidFill>
+              </a:rPr>
+              <a:t> {{MALAYALAM}},</a:t>
+            </a:r>
+            <a:br>
+              <a:rPr lang="en-GB" b="1" dirty="0">
+                <a:solidFill>
+                  <a:srgbClr val="475569"/>
+                </a:solidFill>
+              </a:rPr>
+            </a:br>
+            <a:r>
+              <a:rPr lang="en-GB" b="1" dirty="0">
+                <a:solidFill>
+                  <a:srgbClr val="475569"/>
+                </a:solidFill>
+              </a:rPr>
+              <a:t>{{TAMIL}}</a:t>
+            </a:r>
+            <a:endParaRPr lang="en-IN" b="1" dirty="0">
+              <a:solidFill>
+                <a:srgbClr val="475569"/>
+              </a:solidFill>
+            </a:endParaRPr>
           </a:p>
         </p:txBody>
       </p:sp>
@@ -5592,42 +5032,6 @@
           <a:p>
             <a:pPr algn="ctr"/>
             <a:r>
-              <a:rPr lang="en-GB" sz="1500" b="0" i="0" u="none" dirty="0">
-                <a:solidFill>
-                  <a:srgbClr val="64748B"/>
-                </a:solidFill>
-                <a:latin typeface="Poppins SemiBold"/>
-              </a:rPr>
-              <a:t>{{</a:t>
-            </a:r>
-            <a:r>
-              <a:rPr lang="en-GB" sz="1500" dirty="0">
-                <a:solidFill>
-                  <a:srgbClr val="64748B"/>
-                </a:solidFill>
-                <a:latin typeface="Poppins SemiBold"/>
-              </a:rPr>
-              <a:t>WORD_NUMBER</a:t>
-            </a:r>
-            <a:r>
-              <a:rPr lang="en-GB" sz="1500" b="0" i="0" u="none" dirty="0">
-                <a:solidFill>
-                  <a:srgbClr val="64748B"/>
-                </a:solidFill>
-                <a:latin typeface="Poppins SemiBold"/>
-              </a:rPr>
-              <a:t>}}</a:t>
-            </a:r>
-            <a:r>
-              <a:rPr sz="1500" b="0" i="0" u="none" dirty="0">
-                <a:solidFill>
-                  <a:srgbClr val="64748B"/>
-                </a:solidFill>
-                <a:latin typeface="Poppins SemiBold"/>
-              </a:rPr>
-              <a:t> </a:t>
-            </a:r>
-            <a:r>
               <a:rPr sz="1500" b="0" i="0" u="none" dirty="0">
                 <a:solidFill>
                   <a:srgbClr val="2563EB"/>
@@ -5761,7 +5165,7 @@
         <p:spPr>
           <a:xfrm>
             <a:off x="5869858" y="380999"/>
-            <a:ext cx="5781368" cy="1171475"/>
+            <a:ext cx="5781368" cy="1112228"/>
           </a:xfrm>
           <a:prstGeom prst="rect">
             <a:avLst/>
@@ -5780,7 +5184,7 @@
               </a:lnSpc>
             </a:pPr>
             <a:r>
-              <a:rPr lang="en-GB" sz="7400" b="0" i="0" u="none" dirty="0">
+              <a:rPr lang="en-GB" sz="6600" b="0" i="0" u="none" dirty="0">
                 <a:solidFill>
                   <a:srgbClr val="0F172A"/>
                 </a:solidFill>
@@ -5788,7 +5192,7 @@
               </a:rPr>
               <a:t>{{WORD}}</a:t>
             </a:r>
-            <a:endParaRPr sz="7400" b="0" i="0" u="none" dirty="0">
+            <a:endParaRPr sz="6600" b="0" i="0" u="none" dirty="0">
               <a:solidFill>
                 <a:srgbClr val="0F172A"/>
               </a:solidFill>
@@ -5812,7 +5216,7 @@
         <p:spPr>
           <a:xfrm>
             <a:off x="5652935" y="1760255"/>
-            <a:ext cx="5998291" cy="415498"/>
+            <a:ext cx="5998291" cy="307777"/>
           </a:xfrm>
           <a:prstGeom prst="rect">
             <a:avLst/>
@@ -5827,7 +5231,7 @@
           <a:p>
             <a:pPr algn="ctr"/>
             <a:r>
-              <a:rPr lang="en-GB" sz="2700" b="1" i="0" u="none" dirty="0">
+              <a:rPr lang="en-GB" sz="2000" b="1" i="0" u="none" dirty="0">
                 <a:solidFill>
                   <a:srgbClr val="1E293B"/>
                 </a:solidFill>
@@ -5835,180 +5239,11 @@
               </a:rPr>
               <a:t>{{MEANING}}</a:t>
             </a:r>
-            <a:endParaRPr sz="2700" b="1" i="0" u="none" dirty="0">
+            <a:endParaRPr sz="2000" b="1" i="0" u="none" dirty="0">
               <a:solidFill>
                 <a:srgbClr val="1E293B"/>
               </a:solidFill>
               <a:latin typeface="Poppins"/>
-            </a:endParaRPr>
-          </a:p>
-        </p:txBody>
-      </p:sp>
-      <p:sp>
-        <p:nvSpPr>
-          <p:cNvPr id="9" name="TextBox 8">
-            <a:extLst>
-              <a:ext uri="{FF2B5EF4-FFF2-40B4-BE49-F238E27FC236}">
-                <a16:creationId xmlns:a16="http://schemas.microsoft.com/office/drawing/2014/main" id="{A23C39D6-270D-1294-4906-0E9A9A39D6FB}"/>
-              </a:ext>
-            </a:extLst>
-          </p:cNvPr>
-          <p:cNvSpPr txBox="1"/>
-          <p:nvPr/>
-        </p:nvSpPr>
-        <p:spPr>
-          <a:xfrm>
-            <a:off x="4889704" y="2383534"/>
-            <a:ext cx="3806620" cy="1371600"/>
-          </a:xfrm>
-          <a:prstGeom prst="rect">
-            <a:avLst/>
-          </a:prstGeom>
-          <a:noFill/>
-        </p:spPr>
-        <p:txBody>
-          <a:bodyPr wrap="square" lIns="0" tIns="0" rIns="0" bIns="0" anchor="t">
-            <a:spAutoFit/>
-          </a:bodyPr>
-          <a:lstStyle/>
-          <a:p>
-            <a:pPr algn="ctr">
-              <a:lnSpc>
-                <a:spcPts val="3600"/>
-              </a:lnSpc>
-            </a:pPr>
-            <a:r>
-              <a:rPr lang="en-GB" sz="2400" b="0" i="0" u="none" dirty="0">
-                <a:solidFill>
-                  <a:srgbClr val="475569"/>
-                </a:solidFill>
-                <a:latin typeface="Noto Sans SemiBold"/>
-              </a:rPr>
-              <a:t>{{</a:t>
-            </a:r>
-            <a:r>
-              <a:rPr lang="en-GB" sz="2400" dirty="0">
-                <a:solidFill>
-                  <a:srgbClr val="475569"/>
-                </a:solidFill>
-                <a:latin typeface="Noto Sans SemiBold"/>
-              </a:rPr>
-              <a:t>HINDI</a:t>
-            </a:r>
-            <a:r>
-              <a:rPr lang="en-GB" sz="2400" b="0" i="0" u="none" dirty="0">
-                <a:solidFill>
-                  <a:srgbClr val="475569"/>
-                </a:solidFill>
-                <a:latin typeface="Noto Sans SemiBold"/>
-              </a:rPr>
-              <a:t>}}</a:t>
-            </a:r>
-            <a:r>
-              <a:rPr sz="2400" b="0" i="0" u="none" dirty="0">
-                <a:solidFill>
-                  <a:srgbClr val="475569"/>
-                </a:solidFill>
-                <a:latin typeface="Noto Sans SemiBold"/>
-              </a:rPr>
-              <a:t>,</a:t>
-            </a:r>
-            <a:r>
-              <a:rPr dirty="0"/>
-              <a:t>
-</a:t>
-            </a:r>
-            <a:r>
-              <a:rPr sz="2400" b="0" i="0" u="none" dirty="0">
-                <a:solidFill>
-                  <a:srgbClr val="475569"/>
-                </a:solidFill>
-                <a:latin typeface="Noto Sans SemiBold"/>
-              </a:rPr>
-              <a:t> </a:t>
-            </a:r>
-            <a:r>
-              <a:rPr lang="en-GB" sz="2400" b="0" i="0" u="none" dirty="0">
-                <a:solidFill>
-                  <a:srgbClr val="475569"/>
-                </a:solidFill>
-                <a:latin typeface="Noto Sans SemiBold"/>
-              </a:rPr>
-              <a:t>{{</a:t>
-            </a:r>
-            <a:r>
-              <a:rPr lang="en-GB" sz="2400" dirty="0">
-                <a:solidFill>
-                  <a:srgbClr val="475569"/>
-                </a:solidFill>
-                <a:latin typeface="Noto Sans SemiBold"/>
-              </a:rPr>
-              <a:t>MALAYALAM</a:t>
-            </a:r>
-            <a:r>
-              <a:rPr lang="en-GB" sz="2400" b="0" i="0" u="none" dirty="0">
-                <a:solidFill>
-                  <a:srgbClr val="475569"/>
-                </a:solidFill>
-                <a:latin typeface="Noto Sans SemiBold"/>
-              </a:rPr>
-              <a:t>}}</a:t>
-            </a:r>
-            <a:r>
-              <a:rPr sz="2400" b="0" i="0" u="none" dirty="0">
-                <a:solidFill>
-                  <a:srgbClr val="475569"/>
-                </a:solidFill>
-                <a:latin typeface="Noto Sans SemiBold"/>
-              </a:rPr>
-              <a:t>,</a:t>
-            </a:r>
-            <a:r>
-              <a:rPr dirty="0"/>
-              <a:t>
-</a:t>
-            </a:r>
-            <a:r>
-              <a:rPr sz="2400" b="0" i="0" u="none" dirty="0">
-                <a:solidFill>
-                  <a:srgbClr val="475569"/>
-                </a:solidFill>
-                <a:latin typeface="Noto Sans SemiBold"/>
-              </a:rPr>
-              <a:t> </a:t>
-            </a:r>
-            <a:r>
-              <a:rPr lang="en-GB" sz="2400" b="0" i="0" u="none" dirty="0">
-                <a:solidFill>
-                  <a:srgbClr val="475569"/>
-                </a:solidFill>
-                <a:latin typeface="Noto Sans SemiBold"/>
-              </a:rPr>
-              <a:t>{{</a:t>
-            </a:r>
-            <a:r>
-              <a:rPr lang="en-GB" sz="2400" dirty="0">
-                <a:solidFill>
-                  <a:srgbClr val="475569"/>
-                </a:solidFill>
-                <a:latin typeface="Noto Sans SemiBold"/>
-              </a:rPr>
-              <a:t>TAMIL</a:t>
-            </a:r>
-            <a:r>
-              <a:rPr lang="en-GB" sz="2400" b="0" i="0" u="none" dirty="0">
-                <a:solidFill>
-                  <a:srgbClr val="475569"/>
-                </a:solidFill>
-                <a:latin typeface="Noto Sans SemiBold"/>
-              </a:rPr>
-              <a:t>}}</a:t>
-            </a:r>
-            <a:endParaRPr sz="2400" b="0" i="0" u="none" dirty="0">
-              <a:solidFill>
-                <a:srgbClr val="475569"/>
-              </a:solidFill>
-              <a:latin typeface="Noto Sans SemiBold"/>
             </a:endParaRPr>
           </a:p>
         </p:txBody>
@@ -6218,232 +5453,6 @@
       </p:sp>
       <p:sp>
         <p:nvSpPr>
-          <p:cNvPr id="16" name="TextBox 15">
-            <a:extLst>
-              <a:ext uri="{FF2B5EF4-FFF2-40B4-BE49-F238E27FC236}">
-                <a16:creationId xmlns:a16="http://schemas.microsoft.com/office/drawing/2014/main" id="{9EA6551E-71B7-996E-87B0-BAA17D8A415B}"/>
-              </a:ext>
-            </a:extLst>
-          </p:cNvPr>
-          <p:cNvSpPr txBox="1"/>
-          <p:nvPr/>
-        </p:nvSpPr>
-        <p:spPr>
-          <a:xfrm>
-            <a:off x="2950292" y="4926131"/>
-            <a:ext cx="8774983" cy="369332"/>
-          </a:xfrm>
-          <a:prstGeom prst="rect">
-            <a:avLst/>
-          </a:prstGeom>
-          <a:noFill/>
-        </p:spPr>
-        <p:txBody>
-          <a:bodyPr wrap="square" lIns="0" tIns="0" rIns="0" bIns="0" anchor="t">
-            <a:spAutoFit/>
-          </a:bodyPr>
-          <a:lstStyle/>
-          <a:p>
-            <a:r>
-              <a:rPr lang="en-GB" sz="2400" b="0" i="0" u="none" dirty="0">
-                <a:solidFill>
-                  <a:srgbClr val="2A3644"/>
-                </a:solidFill>
-                <a:latin typeface="Poppins ExtraBold"/>
-              </a:rPr>
-              <a:t>{{</a:t>
-            </a:r>
-            <a:r>
-              <a:rPr lang="en-GB" sz="2400" dirty="0">
-                <a:solidFill>
-                  <a:srgbClr val="2A3644"/>
-                </a:solidFill>
-                <a:latin typeface="Poppins ExtraBold"/>
-              </a:rPr>
-              <a:t>PRESENT_SENTENCE</a:t>
-            </a:r>
-            <a:r>
-              <a:rPr lang="en-GB" sz="2400" b="0" i="0" u="none" dirty="0">
-                <a:solidFill>
-                  <a:srgbClr val="2A3644"/>
-                </a:solidFill>
-                <a:latin typeface="Poppins ExtraBold"/>
-              </a:rPr>
-              <a:t>}}</a:t>
-            </a:r>
-            <a:endParaRPr sz="2400" b="0" i="0" u="none" dirty="0">
-              <a:solidFill>
-                <a:srgbClr val="2A3644"/>
-              </a:solidFill>
-              <a:latin typeface="Poppins ExtraBold"/>
-            </a:endParaRPr>
-          </a:p>
-        </p:txBody>
-      </p:sp>
-      <p:sp>
-        <p:nvSpPr>
-          <p:cNvPr id="10" name="TextBox 9">
-            <a:extLst>
-              <a:ext uri="{FF2B5EF4-FFF2-40B4-BE49-F238E27FC236}">
-                <a16:creationId xmlns:a16="http://schemas.microsoft.com/office/drawing/2014/main" id="{A7719EB7-F939-9669-5498-08964765C4AB}"/>
-              </a:ext>
-            </a:extLst>
-          </p:cNvPr>
-          <p:cNvSpPr txBox="1"/>
-          <p:nvPr/>
-        </p:nvSpPr>
-        <p:spPr>
-          <a:xfrm>
-            <a:off x="3702767" y="5619955"/>
-            <a:ext cx="7560085" cy="369332"/>
-          </a:xfrm>
-          <a:prstGeom prst="rect">
-            <a:avLst/>
-          </a:prstGeom>
-          <a:noFill/>
-        </p:spPr>
-        <p:txBody>
-          <a:bodyPr wrap="square" lIns="0" tIns="0" rIns="0" bIns="0" anchor="t">
-            <a:spAutoFit/>
-          </a:bodyPr>
-          <a:lstStyle/>
-          <a:p>
-            <a:r>
-              <a:rPr lang="en-GB" sz="2400" b="0" i="0" u="none" dirty="0">
-                <a:solidFill>
-                  <a:srgbClr val="2A3644"/>
-                </a:solidFill>
-                <a:latin typeface="Poppins ExtraBold"/>
-              </a:rPr>
-              <a:t>{{</a:t>
-            </a:r>
-            <a:r>
-              <a:rPr lang="en-GB" sz="2400" dirty="0">
-                <a:solidFill>
-                  <a:srgbClr val="2A3644"/>
-                </a:solidFill>
-                <a:latin typeface="Poppins ExtraBold"/>
-              </a:rPr>
-              <a:t>F</a:t>
-            </a:r>
-            <a:r>
-              <a:rPr lang="en-GB" sz="2400" b="0" i="0" u="none" dirty="0">
-                <a:solidFill>
-                  <a:srgbClr val="2A3644"/>
-                </a:solidFill>
-                <a:latin typeface="Poppins ExtraBold"/>
-              </a:rPr>
-              <a:t>UTURE</a:t>
-            </a:r>
-            <a:r>
-              <a:rPr lang="en-GB" sz="2400" dirty="0">
-                <a:solidFill>
-                  <a:srgbClr val="2A3644"/>
-                </a:solidFill>
-                <a:latin typeface="Poppins ExtraBold"/>
-              </a:rPr>
-              <a:t>_SENTENCE</a:t>
-            </a:r>
-            <a:r>
-              <a:rPr lang="en-GB" sz="2400" b="0" i="0" u="none" dirty="0">
-                <a:solidFill>
-                  <a:srgbClr val="2A3644"/>
-                </a:solidFill>
-                <a:latin typeface="Poppins ExtraBold"/>
-              </a:rPr>
-              <a:t>}}</a:t>
-            </a:r>
-            <a:endParaRPr sz="2400" b="0" i="0" u="none" dirty="0">
-              <a:solidFill>
-                <a:srgbClr val="2A3644"/>
-              </a:solidFill>
-              <a:latin typeface="Poppins ExtraBold"/>
-            </a:endParaRPr>
-          </a:p>
-        </p:txBody>
-      </p:sp>
-      <p:sp>
-        <p:nvSpPr>
-          <p:cNvPr id="14" name="TextBox 13">
-            <a:extLst>
-              <a:ext uri="{FF2B5EF4-FFF2-40B4-BE49-F238E27FC236}">
-                <a16:creationId xmlns:a16="http://schemas.microsoft.com/office/drawing/2014/main" id="{E39B2766-06EB-ACF1-5F47-992137BDF7AC}"/>
-              </a:ext>
-            </a:extLst>
-          </p:cNvPr>
-          <p:cNvSpPr txBox="1"/>
-          <p:nvPr/>
-        </p:nvSpPr>
-        <p:spPr>
-          <a:xfrm>
-            <a:off x="3794329" y="2583039"/>
-            <a:ext cx="2190750" cy="923330"/>
-          </a:xfrm>
-          <a:prstGeom prst="rect">
-            <a:avLst/>
-          </a:prstGeom>
-          <a:noFill/>
-        </p:spPr>
-        <p:txBody>
-          <a:bodyPr wrap="square" rtlCol="0">
-            <a:spAutoFit/>
-          </a:bodyPr>
-          <a:lstStyle/>
-          <a:p>
-            <a:pPr algn="ctr"/>
-            <a:r>
-              <a:rPr lang="en-GB" b="1" dirty="0"/>
-              <a:t>{{HINDI}}, {{MALAYALAM}},</a:t>
-            </a:r>
-            <a:br>
-              <a:rPr lang="en-GB" b="1" dirty="0"/>
-            </a:br>
-            <a:r>
-              <a:rPr lang="en-GB" b="1" dirty="0"/>
-              <a:t>{{TAMIL}}</a:t>
-            </a:r>
-            <a:endParaRPr lang="en-IN" b="1" dirty="0"/>
-          </a:p>
-        </p:txBody>
-      </p:sp>
-      <p:sp>
-        <p:nvSpPr>
-          <p:cNvPr id="17" name="TextBox 16">
-            <a:extLst>
-              <a:ext uri="{FF2B5EF4-FFF2-40B4-BE49-F238E27FC236}">
-                <a16:creationId xmlns:a16="http://schemas.microsoft.com/office/drawing/2014/main" id="{A2BDFC54-52D3-1CC7-0794-2AB566E6EA00}"/>
-              </a:ext>
-            </a:extLst>
-          </p:cNvPr>
-          <p:cNvSpPr txBox="1"/>
-          <p:nvPr/>
-        </p:nvSpPr>
-        <p:spPr>
-          <a:xfrm>
-            <a:off x="314325" y="6055475"/>
-            <a:ext cx="2381250" cy="369332"/>
-          </a:xfrm>
-          <a:prstGeom prst="rect">
-            <a:avLst/>
-          </a:prstGeom>
-          <a:noFill/>
-        </p:spPr>
-        <p:txBody>
-          <a:bodyPr wrap="square" rtlCol="0">
-            <a:spAutoFit/>
-          </a:bodyPr>
-          <a:lstStyle/>
-          <a:p>
-            <a:r>
-              <a:rPr lang="en-GB" dirty="0"/>
-              <a:t>{{WORD_NUMBER}}</a:t>
-            </a:r>
-            <a:endParaRPr lang="en-IN" dirty="0"/>
-          </a:p>
-        </p:txBody>
-      </p:sp>
-      <p:sp>
-        <p:nvSpPr>
           <p:cNvPr id="13" name="TextBox 12">
             <a:extLst>
               <a:ext uri="{FF2B5EF4-FFF2-40B4-BE49-F238E27FC236}">
@@ -6456,8 +5465,8 @@
         </p:nvSpPr>
         <p:spPr>
           <a:xfrm>
-            <a:off x="3191316" y="5312798"/>
-            <a:ext cx="2753032" cy="369332"/>
+            <a:off x="2895599" y="4948361"/>
+            <a:ext cx="8071536" cy="461665"/>
           </a:xfrm>
           <a:prstGeom prst="rect">
             <a:avLst/>
@@ -6471,10 +5480,18 @@
           <a:lstStyle/>
           <a:p>
             <a:r>
-              <a:rPr lang="en-GB" dirty="0"/>
+              <a:rPr lang="en-GB" sz="2400" b="1" dirty="0">
+                <a:solidFill>
+                  <a:srgbClr val="2A3644"/>
+                </a:solidFill>
+              </a:rPr>
               <a:t>{{PRESENT_SENTENCE}}</a:t>
             </a:r>
-            <a:endParaRPr lang="en-IN" dirty="0"/>
+            <a:endParaRPr lang="en-IN" sz="2400" b="1" dirty="0">
+              <a:solidFill>
+                <a:srgbClr val="2A3644"/>
+              </a:solidFill>
+            </a:endParaRPr>
           </a:p>
         </p:txBody>
       </p:sp>
@@ -6492,8 +5509,8 @@
         </p:nvSpPr>
         <p:spPr>
           <a:xfrm>
-            <a:off x="4276419" y="6006622"/>
-            <a:ext cx="2753032" cy="369332"/>
+            <a:off x="3794638" y="5554756"/>
+            <a:ext cx="6593757" cy="461665"/>
           </a:xfrm>
           <a:prstGeom prst="rect">
             <a:avLst/>
@@ -6507,10 +5524,133 @@
           <a:lstStyle/>
           <a:p>
             <a:r>
-              <a:rPr lang="en-GB" dirty="0"/>
+              <a:rPr lang="en-GB" sz="2400" b="1" dirty="0">
+                <a:solidFill>
+                  <a:srgbClr val="2A3644"/>
+                </a:solidFill>
+              </a:rPr>
               <a:t>{{FUTURE_SENTENCE}}</a:t>
             </a:r>
-            <a:endParaRPr lang="en-IN" dirty="0"/>
+            <a:endParaRPr lang="en-IN" sz="2400" b="1" dirty="0">
+              <a:solidFill>
+                <a:srgbClr val="2A3644"/>
+              </a:solidFill>
+            </a:endParaRPr>
+          </a:p>
+        </p:txBody>
+      </p:sp>
+      <p:sp>
+        <p:nvSpPr>
+          <p:cNvPr id="10" name="TextBox 9">
+            <a:extLst>
+              <a:ext uri="{FF2B5EF4-FFF2-40B4-BE49-F238E27FC236}">
+                <a16:creationId xmlns:a16="http://schemas.microsoft.com/office/drawing/2014/main" id="{2EB5960A-98FD-C624-A616-C23C3B183BE0}"/>
+              </a:ext>
+            </a:extLst>
+          </p:cNvPr>
+          <p:cNvSpPr txBox="1"/>
+          <p:nvPr/>
+        </p:nvSpPr>
+        <p:spPr>
+          <a:xfrm>
+            <a:off x="314325" y="6055475"/>
+            <a:ext cx="2381250" cy="369332"/>
+          </a:xfrm>
+          <a:prstGeom prst="rect">
+            <a:avLst/>
+          </a:prstGeom>
+          <a:noFill/>
+        </p:spPr>
+        <p:txBody>
+          <a:bodyPr wrap="square" rtlCol="0">
+            <a:spAutoFit/>
+          </a:bodyPr>
+          <a:lstStyle/>
+          <a:p>
+            <a:r>
+              <a:rPr lang="en-GB" b="1" dirty="0">
+                <a:solidFill>
+                  <a:srgbClr val="64748B"/>
+                </a:solidFill>
+              </a:rPr>
+              <a:t>{{WORD_NUMBER}}</a:t>
+            </a:r>
+            <a:endParaRPr lang="en-IN" b="1" dirty="0">
+              <a:solidFill>
+                <a:srgbClr val="64748B"/>
+              </a:solidFill>
+            </a:endParaRPr>
+          </a:p>
+        </p:txBody>
+      </p:sp>
+      <p:sp>
+        <p:nvSpPr>
+          <p:cNvPr id="16" name="TextBox 15">
+            <a:extLst>
+              <a:ext uri="{FF2B5EF4-FFF2-40B4-BE49-F238E27FC236}">
+                <a16:creationId xmlns:a16="http://schemas.microsoft.com/office/drawing/2014/main" id="{41AE4CF2-87B2-9E90-5571-EBB293BCDA70}"/>
+              </a:ext>
+            </a:extLst>
+          </p:cNvPr>
+          <p:cNvSpPr txBox="1"/>
+          <p:nvPr/>
+        </p:nvSpPr>
+        <p:spPr>
+          <a:xfrm>
+            <a:off x="4567832" y="2392569"/>
+            <a:ext cx="4723651" cy="923330"/>
+          </a:xfrm>
+          <a:prstGeom prst="rect">
+            <a:avLst/>
+          </a:prstGeom>
+          <a:noFill/>
+        </p:spPr>
+        <p:txBody>
+          <a:bodyPr wrap="square" rtlCol="0">
+            <a:spAutoFit/>
+          </a:bodyPr>
+          <a:lstStyle/>
+          <a:p>
+            <a:pPr algn="ctr"/>
+            <a:r>
+              <a:rPr lang="en-GB" b="1" dirty="0">
+                <a:solidFill>
+                  <a:srgbClr val="475569"/>
+                </a:solidFill>
+              </a:rPr>
+              <a:t>{{HINDI}},</a:t>
+            </a:r>
+          </a:p>
+          <a:p>
+            <a:pPr algn="ctr"/>
+            <a:r>
+              <a:rPr lang="en-GB" b="1" dirty="0">
+                <a:solidFill>
+                  <a:srgbClr val="475569"/>
+                </a:solidFill>
+              </a:rPr>
+              <a:t> {{MALAYALAM}},</a:t>
+            </a:r>
+            <a:br>
+              <a:rPr lang="en-GB" b="1" dirty="0">
+                <a:solidFill>
+                  <a:srgbClr val="475569"/>
+                </a:solidFill>
+              </a:rPr>
+            </a:br>
+            <a:r>
+              <a:rPr lang="en-GB" b="1" dirty="0">
+                <a:solidFill>
+                  <a:srgbClr val="475569"/>
+                </a:solidFill>
+              </a:rPr>
+              <a:t>{{TAMIL}}</a:t>
+            </a:r>
+            <a:endParaRPr lang="en-IN" b="1" dirty="0">
+              <a:solidFill>
+                <a:srgbClr val="475569"/>
+              </a:solidFill>
+            </a:endParaRPr>
           </a:p>
         </p:txBody>
       </p:sp>
